--- a/docs/toss-payment-flow.pptx
+++ b/docs/toss-payment-flow.pptx
@@ -2781,7 +2781,7 @@
         <p:spPr>
           <a:xfrm>
             <a:off x="548640" y="1737360"/>
-            <a:ext cx="6858000" cy="4480560"/>
+            <a:ext cx="2286000" cy="4754880"/>
           </a:xfrm>
           <a:prstGeom prst="rect">
             <a:avLst/>
@@ -2805,8 +2805,8 @@
         </p:nvSpPr>
         <p:spPr>
           <a:xfrm>
-            <a:off x="548640" y="3520440"/>
-            <a:ext cx="6858000" cy="365760"/>
+            <a:off x="548640" y="3657600"/>
+            <a:ext cx="2286000" cy="365760"/>
           </a:xfrm>
           <a:prstGeom prst="rect">
             <a:avLst/>
@@ -2844,8 +2844,8 @@
         </p:nvSpPr>
         <p:spPr>
           <a:xfrm>
-            <a:off x="548640" y="3931920"/>
-            <a:ext cx="6858000" cy="274320"/>
+            <a:off x="548640" y="4069080"/>
+            <a:ext cx="2286000" cy="274320"/>
           </a:xfrm>
           <a:prstGeom prst="rect">
             <a:avLst/>
@@ -2883,8 +2883,8 @@
         </p:nvSpPr>
         <p:spPr>
           <a:xfrm>
-            <a:off x="548640" y="4251960"/>
-            <a:ext cx="6858000" cy="274320"/>
+            <a:off x="548640" y="4389120"/>
+            <a:ext cx="2286000" cy="274320"/>
           </a:xfrm>
           <a:prstGeom prst="rect">
             <a:avLst/>
@@ -2922,8 +2922,8 @@
         </p:nvSpPr>
         <p:spPr>
           <a:xfrm>
-            <a:off x="7680960" y="1737360"/>
-            <a:ext cx="4023360" cy="274320"/>
+            <a:off x="3200400" y="1737360"/>
+            <a:ext cx="8503920" cy="274320"/>
           </a:xfrm>
           <a:prstGeom prst="rect">
             <a:avLst/>
@@ -2963,8 +2963,8 @@
         </p:nvSpPr>
         <p:spPr>
           <a:xfrm>
-            <a:off x="7680960" y="2011680"/>
-            <a:ext cx="4023360" cy="365760"/>
+            <a:off x="3200400" y="2011680"/>
+            <a:ext cx="8503920" cy="365760"/>
           </a:xfrm>
           <a:prstGeom prst="rect">
             <a:avLst/>
@@ -2980,7 +2980,7 @@
               <a:buNone/>
             </a:pPr>
             <a:r>
-              <a:rPr lang="en-US" sz="1200" u="sng" dirty="0">
+              <a:rPr lang="en-US" sz="1300" u="sng" dirty="0">
                 <a:solidFill>
                   <a:srgbClr val="2C2418"/>
                 </a:solidFill>
@@ -2997,7 +2997,7 @@
               </a:rPr>
               <a:t>tosspayments.com (SDK Popup)</a:t>
             </a:r>
-            <a:endParaRPr lang="en-US" sz="1200" dirty="0"/>
+            <a:endParaRPr lang="en-US" sz="1300" dirty="0"/>
           </a:p>
         </p:txBody>
       </p:sp>
@@ -3009,8 +3009,8 @@
         </p:nvSpPr>
         <p:spPr>
           <a:xfrm>
-            <a:off x="7680960" y="2560320"/>
-            <a:ext cx="4023360" cy="0"/>
+            <a:off x="3200400" y="2560320"/>
+            <a:ext cx="8503920" cy="0"/>
           </a:xfrm>
           <a:prstGeom prst="line">
             <a:avLst/>
@@ -3032,8 +3032,8 @@
         </p:nvSpPr>
         <p:spPr>
           <a:xfrm>
-            <a:off x="7680960" y="2743200"/>
-            <a:ext cx="4023360" cy="274320"/>
+            <a:off x="3200400" y="2743200"/>
+            <a:ext cx="8503920" cy="274320"/>
           </a:xfrm>
           <a:prstGeom prst="rect">
             <a:avLst/>
@@ -3071,8 +3071,8 @@
         </p:nvSpPr>
         <p:spPr>
           <a:xfrm>
-            <a:off x="7680960" y="3017520"/>
-            <a:ext cx="4023360" cy="3200400"/>
+            <a:off x="3200400" y="3017520"/>
+            <a:ext cx="8503920" cy="3200400"/>
           </a:xfrm>
           <a:prstGeom prst="rect">
             <a:avLst/>
@@ -3086,13 +3086,13 @@
           <a:p>
             <a:pPr marL="342900" indent="-342900">
               <a:spcAft>
-                <a:spcPts val="600"/>
+                <a:spcPts val="800"/>
               </a:spcAft>
               <a:buSzPct val="100000"/>
               <a:buChar char="●"/>
             </a:pPr>
             <a:r>
-              <a:rPr lang="en-US" sz="1200" dirty="0">
+              <a:rPr lang="en-US" sz="1300" dirty="0">
                 <a:solidFill>
                   <a:srgbClr val="2C2418"/>
                 </a:solidFill>
@@ -3102,18 +3102,18 @@
               </a:rPr>
               <a:t>Toss Payments SDK로 호출되는 공식 결제창</a:t>
             </a:r>
-            <a:endParaRPr lang="en-US" sz="1200" dirty="0"/>
+            <a:endParaRPr lang="en-US" sz="1300" dirty="0"/>
           </a:p>
           <a:p>
             <a:pPr marL="342900" indent="-342900">
               <a:spcAft>
-                <a:spcPts val="600"/>
+                <a:spcPts val="800"/>
               </a:spcAft>
               <a:buSzPct val="100000"/>
               <a:buChar char="●"/>
             </a:pPr>
             <a:r>
-              <a:rPr lang="en-US" sz="1200" dirty="0">
+              <a:rPr lang="en-US" sz="1300" dirty="0">
                 <a:solidFill>
                   <a:srgbClr val="2C2418"/>
                 </a:solidFill>
@@ -3123,18 +3123,18 @@
               </a:rPr>
               <a:t>카드 · 간편결제 · 계좌이체 등 사용자가 수단 선택</a:t>
             </a:r>
-            <a:endParaRPr lang="en-US" sz="1200" dirty="0"/>
+            <a:endParaRPr lang="en-US" sz="1300" dirty="0"/>
           </a:p>
           <a:p>
             <a:pPr marL="342900" indent="-342900">
               <a:spcAft>
-                <a:spcPts val="600"/>
+                <a:spcPts val="800"/>
               </a:spcAft>
               <a:buSzPct val="100000"/>
               <a:buChar char="●"/>
             </a:pPr>
             <a:r>
-              <a:rPr lang="en-US" sz="1200" dirty="0">
+              <a:rPr lang="en-US" sz="1300" dirty="0">
                 <a:solidFill>
                   <a:srgbClr val="2C2418"/>
                 </a:solidFill>
@@ -3144,18 +3144,18 @@
               </a:rPr>
               <a:t>customerKey는 서비스 내 사용자 ID로 전달하여 이력 추적</a:t>
             </a:r>
-            <a:endParaRPr lang="en-US" sz="1200" dirty="0"/>
+            <a:endParaRPr lang="en-US" sz="1300" dirty="0"/>
           </a:p>
           <a:p>
             <a:pPr marL="342900" indent="-342900">
               <a:spcAft>
-                <a:spcPts val="600"/>
+                <a:spcPts val="800"/>
               </a:spcAft>
               <a:buSzPct val="100000"/>
               <a:buChar char="●"/>
             </a:pPr>
             <a:r>
-              <a:rPr lang="en-US" sz="1200" dirty="0">
+              <a:rPr lang="en-US" sz="1300" dirty="0">
                 <a:solidFill>
                   <a:srgbClr val="2C2418"/>
                 </a:solidFill>
@@ -3165,7 +3165,7 @@
               </a:rPr>
               <a:t>orderName은 "갓챠사주 코인 N개" 형식으로 전달</a:t>
             </a:r>
-            <a:endParaRPr lang="en-US" sz="1200" dirty="0"/>
+            <a:endParaRPr lang="en-US" sz="1300" dirty="0"/>
           </a:p>
         </p:txBody>
       </p:sp>
@@ -3366,7 +3366,7 @@
         <p:spPr>
           <a:xfrm>
             <a:off x="548640" y="1737360"/>
-            <a:ext cx="6858000" cy="4480560"/>
+            <a:ext cx="2286000" cy="4754880"/>
           </a:xfrm>
           <a:prstGeom prst="rect">
             <a:avLst/>
@@ -3390,8 +3390,8 @@
         </p:nvSpPr>
         <p:spPr>
           <a:xfrm>
-            <a:off x="548640" y="3520440"/>
-            <a:ext cx="6858000" cy="365760"/>
+            <a:off x="548640" y="3657600"/>
+            <a:ext cx="2286000" cy="365760"/>
           </a:xfrm>
           <a:prstGeom prst="rect">
             <a:avLst/>
@@ -3429,8 +3429,8 @@
         </p:nvSpPr>
         <p:spPr>
           <a:xfrm>
-            <a:off x="548640" y="3931920"/>
-            <a:ext cx="6858000" cy="274320"/>
+            <a:off x="548640" y="4069080"/>
+            <a:ext cx="2286000" cy="274320"/>
           </a:xfrm>
           <a:prstGeom prst="rect">
             <a:avLst/>
@@ -3468,8 +3468,8 @@
         </p:nvSpPr>
         <p:spPr>
           <a:xfrm>
-            <a:off x="548640" y="4251960"/>
-            <a:ext cx="6858000" cy="274320"/>
+            <a:off x="548640" y="4389120"/>
+            <a:ext cx="2286000" cy="274320"/>
           </a:xfrm>
           <a:prstGeom prst="rect">
             <a:avLst/>
@@ -3507,8 +3507,8 @@
         </p:nvSpPr>
         <p:spPr>
           <a:xfrm>
-            <a:off x="7680960" y="1737360"/>
-            <a:ext cx="4023360" cy="274320"/>
+            <a:off x="3200400" y="1737360"/>
+            <a:ext cx="8503920" cy="274320"/>
           </a:xfrm>
           <a:prstGeom prst="rect">
             <a:avLst/>
@@ -3548,8 +3548,8 @@
         </p:nvSpPr>
         <p:spPr>
           <a:xfrm>
-            <a:off x="7680960" y="2011680"/>
-            <a:ext cx="4023360" cy="365760"/>
+            <a:off x="3200400" y="2011680"/>
+            <a:ext cx="8503920" cy="365760"/>
           </a:xfrm>
           <a:prstGeom prst="rect">
             <a:avLst/>
@@ -3565,7 +3565,7 @@
               <a:buNone/>
             </a:pPr>
             <a:r>
-              <a:rPr lang="en-US" sz="1200" u="sng" dirty="0">
+              <a:rPr lang="en-US" sz="1300" u="sng" dirty="0">
                 <a:solidFill>
                   <a:srgbClr val="2C2418"/>
                 </a:solidFill>
@@ -3582,7 +3582,7 @@
               </a:rPr>
               <a:t>https://gatch-saju.onato.co.kr/coins/success</a:t>
             </a:r>
-            <a:endParaRPr lang="en-US" sz="1200" dirty="0"/>
+            <a:endParaRPr lang="en-US" sz="1300" dirty="0"/>
           </a:p>
         </p:txBody>
       </p:sp>
@@ -3594,8 +3594,8 @@
         </p:nvSpPr>
         <p:spPr>
           <a:xfrm>
-            <a:off x="7680960" y="2560320"/>
-            <a:ext cx="4023360" cy="0"/>
+            <a:off x="3200400" y="2560320"/>
+            <a:ext cx="8503920" cy="0"/>
           </a:xfrm>
           <a:prstGeom prst="line">
             <a:avLst/>
@@ -3617,8 +3617,8 @@
         </p:nvSpPr>
         <p:spPr>
           <a:xfrm>
-            <a:off x="7680960" y="2743200"/>
-            <a:ext cx="4023360" cy="274320"/>
+            <a:off x="3200400" y="2743200"/>
+            <a:ext cx="8503920" cy="274320"/>
           </a:xfrm>
           <a:prstGeom prst="rect">
             <a:avLst/>
@@ -3656,8 +3656,8 @@
         </p:nvSpPr>
         <p:spPr>
           <a:xfrm>
-            <a:off x="7680960" y="3017520"/>
-            <a:ext cx="4023360" cy="3200400"/>
+            <a:off x="3200400" y="3017520"/>
+            <a:ext cx="8503920" cy="3200400"/>
           </a:xfrm>
           <a:prstGeom prst="rect">
             <a:avLst/>
@@ -3671,13 +3671,13 @@
           <a:p>
             <a:pPr marL="342900" indent="-342900">
               <a:spcAft>
-                <a:spcPts val="600"/>
+                <a:spcPts val="800"/>
               </a:spcAft>
               <a:buSzPct val="100000"/>
               <a:buChar char="●"/>
             </a:pPr>
             <a:r>
-              <a:rPr lang="en-US" sz="1200" dirty="0">
+              <a:rPr lang="en-US" sz="1300" dirty="0">
                 <a:solidFill>
                   <a:srgbClr val="2C2418"/>
                 </a:solidFill>
@@ -3687,18 +3687,18 @@
               </a:rPr>
               <a:t>Toss 결제 승인 후 /api/payments/confirm 호출</a:t>
             </a:r>
-            <a:endParaRPr lang="en-US" sz="1200" dirty="0"/>
+            <a:endParaRPr lang="en-US" sz="1300" dirty="0"/>
           </a:p>
           <a:p>
             <a:pPr marL="342900" indent="-342900">
               <a:spcAft>
-                <a:spcPts val="600"/>
+                <a:spcPts val="800"/>
               </a:spcAft>
               <a:buSzPct val="100000"/>
               <a:buChar char="●"/>
             </a:pPr>
             <a:r>
-              <a:rPr lang="en-US" sz="1200" dirty="0">
+              <a:rPr lang="en-US" sz="1300" dirty="0">
                 <a:solidFill>
                   <a:srgbClr val="2C2418"/>
                 </a:solidFill>
@@ -3708,18 +3708,18 @@
               </a:rPr>
               <a:t>users.coins 증가 + coin_transactions 이력 기록</a:t>
             </a:r>
-            <a:endParaRPr lang="en-US" sz="1200" dirty="0"/>
+            <a:endParaRPr lang="en-US" sz="1300" dirty="0"/>
           </a:p>
           <a:p>
             <a:pPr marL="342900" indent="-342900">
               <a:spcAft>
-                <a:spcPts val="600"/>
+                <a:spcPts val="800"/>
               </a:spcAft>
               <a:buSzPct val="100000"/>
               <a:buChar char="●"/>
             </a:pPr>
             <a:r>
-              <a:rPr lang="en-US" sz="1200" dirty="0">
+              <a:rPr lang="en-US" sz="1300" dirty="0">
                 <a:solidFill>
                   <a:srgbClr val="2C2418"/>
                 </a:solidFill>
@@ -3729,18 +3729,18 @@
               </a:rPr>
               <a:t>사용자에게 충전 수량 · 현재 잔액 · "뽑으러 가기" CTA 표시</a:t>
             </a:r>
-            <a:endParaRPr lang="en-US" sz="1200" dirty="0"/>
+            <a:endParaRPr lang="en-US" sz="1300" dirty="0"/>
           </a:p>
           <a:p>
             <a:pPr marL="342900" indent="-342900">
               <a:spcAft>
-                <a:spcPts val="600"/>
+                <a:spcPts val="800"/>
               </a:spcAft>
               <a:buSzPct val="100000"/>
               <a:buChar char="●"/>
             </a:pPr>
             <a:r>
-              <a:rPr lang="en-US" sz="1200" dirty="0">
+              <a:rPr lang="en-US" sz="1300" dirty="0">
                 <a:solidFill>
                   <a:srgbClr val="2C2418"/>
                 </a:solidFill>
@@ -3750,7 +3750,7 @@
               </a:rPr>
               <a:t>returnTo 쿼리가 있으면 원래 경로로 자동 복귀</a:t>
             </a:r>
-            <a:endParaRPr lang="en-US" sz="1200" dirty="0"/>
+            <a:endParaRPr lang="en-US" sz="1300" dirty="0"/>
           </a:p>
         </p:txBody>
       </p:sp>
@@ -3951,7 +3951,7 @@
         <p:spPr>
           <a:xfrm>
             <a:off x="548640" y="1737360"/>
-            <a:ext cx="6858000" cy="4480560"/>
+            <a:ext cx="2286000" cy="4754880"/>
           </a:xfrm>
           <a:prstGeom prst="rect">
             <a:avLst/>
@@ -3975,8 +3975,8 @@
         </p:nvSpPr>
         <p:spPr>
           <a:xfrm>
-            <a:off x="548640" y="3520440"/>
-            <a:ext cx="6858000" cy="365760"/>
+            <a:off x="548640" y="3657600"/>
+            <a:ext cx="2286000" cy="365760"/>
           </a:xfrm>
           <a:prstGeom prst="rect">
             <a:avLst/>
@@ -4014,8 +4014,8 @@
         </p:nvSpPr>
         <p:spPr>
           <a:xfrm>
-            <a:off x="548640" y="3931920"/>
-            <a:ext cx="6858000" cy="274320"/>
+            <a:off x="548640" y="4069080"/>
+            <a:ext cx="2286000" cy="274320"/>
           </a:xfrm>
           <a:prstGeom prst="rect">
             <a:avLst/>
@@ -4053,8 +4053,8 @@
         </p:nvSpPr>
         <p:spPr>
           <a:xfrm>
-            <a:off x="548640" y="4251960"/>
-            <a:ext cx="6858000" cy="274320"/>
+            <a:off x="548640" y="4389120"/>
+            <a:ext cx="2286000" cy="274320"/>
           </a:xfrm>
           <a:prstGeom prst="rect">
             <a:avLst/>
@@ -4092,8 +4092,8 @@
         </p:nvSpPr>
         <p:spPr>
           <a:xfrm>
-            <a:off x="7680960" y="1737360"/>
-            <a:ext cx="4023360" cy="274320"/>
+            <a:off x="3200400" y="1737360"/>
+            <a:ext cx="8503920" cy="274320"/>
           </a:xfrm>
           <a:prstGeom prst="rect">
             <a:avLst/>
@@ -4133,8 +4133,8 @@
         </p:nvSpPr>
         <p:spPr>
           <a:xfrm>
-            <a:off x="7680960" y="2011680"/>
-            <a:ext cx="4023360" cy="365760"/>
+            <a:off x="3200400" y="2011680"/>
+            <a:ext cx="8503920" cy="365760"/>
           </a:xfrm>
           <a:prstGeom prst="rect">
             <a:avLst/>
@@ -4150,7 +4150,7 @@
               <a:buNone/>
             </a:pPr>
             <a:r>
-              <a:rPr lang="en-US" sz="1200" u="sng" dirty="0">
+              <a:rPr lang="en-US" sz="1300" u="sng" dirty="0">
                 <a:solidFill>
                   <a:srgbClr val="2C2418"/>
                 </a:solidFill>
@@ -4167,7 +4167,7 @@
               </a:rPr>
               <a:t>https://gatch-saju.onato.co.kr/coins/fail</a:t>
             </a:r>
-            <a:endParaRPr lang="en-US" sz="1200" dirty="0"/>
+            <a:endParaRPr lang="en-US" sz="1300" dirty="0"/>
           </a:p>
         </p:txBody>
       </p:sp>
@@ -4179,8 +4179,8 @@
         </p:nvSpPr>
         <p:spPr>
           <a:xfrm>
-            <a:off x="7680960" y="2560320"/>
-            <a:ext cx="4023360" cy="0"/>
+            <a:off x="3200400" y="2560320"/>
+            <a:ext cx="8503920" cy="0"/>
           </a:xfrm>
           <a:prstGeom prst="line">
             <a:avLst/>
@@ -4202,8 +4202,8 @@
         </p:nvSpPr>
         <p:spPr>
           <a:xfrm>
-            <a:off x="7680960" y="2743200"/>
-            <a:ext cx="4023360" cy="274320"/>
+            <a:off x="3200400" y="2743200"/>
+            <a:ext cx="8503920" cy="274320"/>
           </a:xfrm>
           <a:prstGeom prst="rect">
             <a:avLst/>
@@ -4241,8 +4241,8 @@
         </p:nvSpPr>
         <p:spPr>
           <a:xfrm>
-            <a:off x="7680960" y="3017520"/>
-            <a:ext cx="4023360" cy="3200400"/>
+            <a:off x="3200400" y="3017520"/>
+            <a:ext cx="8503920" cy="3200400"/>
           </a:xfrm>
           <a:prstGeom prst="rect">
             <a:avLst/>
@@ -4256,13 +4256,13 @@
           <a:p>
             <a:pPr marL="342900" indent="-342900">
               <a:spcAft>
-                <a:spcPts val="600"/>
+                <a:spcPts val="800"/>
               </a:spcAft>
               <a:buSzPct val="100000"/>
               <a:buChar char="●"/>
             </a:pPr>
             <a:r>
-              <a:rPr lang="en-US" sz="1200" dirty="0">
+              <a:rPr lang="en-US" sz="1300" dirty="0">
                 <a:solidFill>
                   <a:srgbClr val="2C2418"/>
                 </a:solidFill>
@@ -4272,18 +4272,18 @@
               </a:rPr>
               <a:t>카드사 거절 · 결제 중단 · 시스템 오류 등 실패 케이스</a:t>
             </a:r>
-            <a:endParaRPr lang="en-US" sz="1200" dirty="0"/>
+            <a:endParaRPr lang="en-US" sz="1300" dirty="0"/>
           </a:p>
           <a:p>
             <a:pPr marL="342900" indent="-342900">
               <a:spcAft>
-                <a:spcPts val="600"/>
+                <a:spcPts val="800"/>
               </a:spcAft>
               <a:buSzPct val="100000"/>
               <a:buChar char="●"/>
             </a:pPr>
             <a:r>
-              <a:rPr lang="en-US" sz="1200" dirty="0">
+              <a:rPr lang="en-US" sz="1300" dirty="0">
                 <a:solidFill>
                   <a:srgbClr val="2C2418"/>
                 </a:solidFill>
@@ -4293,18 +4293,18 @@
               </a:rPr>
               <a:t>오류 코드 + 친절한 안내 문구 표시</a:t>
             </a:r>
-            <a:endParaRPr lang="en-US" sz="1200" dirty="0"/>
+            <a:endParaRPr lang="en-US" sz="1300" dirty="0"/>
           </a:p>
           <a:p>
             <a:pPr marL="342900" indent="-342900">
               <a:spcAft>
-                <a:spcPts val="600"/>
+                <a:spcPts val="800"/>
               </a:spcAft>
               <a:buSzPct val="100000"/>
               <a:buChar char="●"/>
             </a:pPr>
             <a:r>
-              <a:rPr lang="en-US" sz="1200" dirty="0">
+              <a:rPr lang="en-US" sz="1300" dirty="0">
                 <a:solidFill>
                   <a:srgbClr val="2C2418"/>
                 </a:solidFill>
@@ -4314,7 +4314,7 @@
               </a:rPr>
               <a:t>"다시 시도" 버튼으로 /coins 재진입, 홈으로 링크 제공</a:t>
             </a:r>
-            <a:endParaRPr lang="en-US" sz="1200" dirty="0"/>
+            <a:endParaRPr lang="en-US" sz="1300" dirty="0"/>
           </a:p>
         </p:txBody>
       </p:sp>
@@ -4515,7 +4515,7 @@
         <p:spPr>
           <a:xfrm>
             <a:off x="548640" y="1737360"/>
-            <a:ext cx="6858000" cy="4480560"/>
+            <a:ext cx="2286000" cy="4754880"/>
           </a:xfrm>
           <a:prstGeom prst="rect">
             <a:avLst/>
@@ -4539,8 +4539,8 @@
         </p:nvSpPr>
         <p:spPr>
           <a:xfrm>
-            <a:off x="548640" y="3520440"/>
-            <a:ext cx="6858000" cy="365760"/>
+            <a:off x="548640" y="3657600"/>
+            <a:ext cx="2286000" cy="365760"/>
           </a:xfrm>
           <a:prstGeom prst="rect">
             <a:avLst/>
@@ -4578,8 +4578,8 @@
         </p:nvSpPr>
         <p:spPr>
           <a:xfrm>
-            <a:off x="548640" y="3931920"/>
-            <a:ext cx="6858000" cy="274320"/>
+            <a:off x="548640" y="4069080"/>
+            <a:ext cx="2286000" cy="274320"/>
           </a:xfrm>
           <a:prstGeom prst="rect">
             <a:avLst/>
@@ -4617,8 +4617,8 @@
         </p:nvSpPr>
         <p:spPr>
           <a:xfrm>
-            <a:off x="548640" y="4251960"/>
-            <a:ext cx="6858000" cy="274320"/>
+            <a:off x="548640" y="4389120"/>
+            <a:ext cx="2286000" cy="274320"/>
           </a:xfrm>
           <a:prstGeom prst="rect">
             <a:avLst/>
@@ -4656,8 +4656,8 @@
         </p:nvSpPr>
         <p:spPr>
           <a:xfrm>
-            <a:off x="7680960" y="1737360"/>
-            <a:ext cx="4023360" cy="274320"/>
+            <a:off x="3200400" y="1737360"/>
+            <a:ext cx="8503920" cy="274320"/>
           </a:xfrm>
           <a:prstGeom prst="rect">
             <a:avLst/>
@@ -4697,8 +4697,8 @@
         </p:nvSpPr>
         <p:spPr>
           <a:xfrm>
-            <a:off x="7680960" y="2011680"/>
-            <a:ext cx="4023360" cy="365760"/>
+            <a:off x="3200400" y="2011680"/>
+            <a:ext cx="8503920" cy="365760"/>
           </a:xfrm>
           <a:prstGeom prst="rect">
             <a:avLst/>
@@ -4714,7 +4714,7 @@
               <a:buNone/>
             </a:pPr>
             <a:r>
-              <a:rPr lang="en-US" sz="1200" u="sng" dirty="0">
+              <a:rPr lang="en-US" sz="1300" u="sng" dirty="0">
                 <a:solidFill>
                   <a:srgbClr val="2C2418"/>
                 </a:solidFill>
@@ -4731,7 +4731,7 @@
               </a:rPr>
               <a:t>https://gatch-saju.onato.co.kr/reading/{id}</a:t>
             </a:r>
-            <a:endParaRPr lang="en-US" sz="1200" dirty="0"/>
+            <a:endParaRPr lang="en-US" sz="1300" dirty="0"/>
           </a:p>
         </p:txBody>
       </p:sp>
@@ -4743,8 +4743,8 @@
         </p:nvSpPr>
         <p:spPr>
           <a:xfrm>
-            <a:off x="7680960" y="2560320"/>
-            <a:ext cx="4023360" cy="0"/>
+            <a:off x="3200400" y="2560320"/>
+            <a:ext cx="8503920" cy="0"/>
           </a:xfrm>
           <a:prstGeom prst="line">
             <a:avLst/>
@@ -4766,8 +4766,8 @@
         </p:nvSpPr>
         <p:spPr>
           <a:xfrm>
-            <a:off x="7680960" y="2743200"/>
-            <a:ext cx="4023360" cy="274320"/>
+            <a:off x="3200400" y="2743200"/>
+            <a:ext cx="8503920" cy="274320"/>
           </a:xfrm>
           <a:prstGeom prst="rect">
             <a:avLst/>
@@ -4805,8 +4805,8 @@
         </p:nvSpPr>
         <p:spPr>
           <a:xfrm>
-            <a:off x="7680960" y="3017520"/>
-            <a:ext cx="4023360" cy="3200400"/>
+            <a:off x="3200400" y="3017520"/>
+            <a:ext cx="8503920" cy="3200400"/>
           </a:xfrm>
           <a:prstGeom prst="rect">
             <a:avLst/>
@@ -4820,13 +4820,13 @@
           <a:p>
             <a:pPr marL="342900" indent="-342900">
               <a:spcAft>
-                <a:spcPts val="600"/>
+                <a:spcPts val="800"/>
               </a:spcAft>
               <a:buSzPct val="100000"/>
               <a:buChar char="●"/>
             </a:pPr>
             <a:r>
-              <a:rPr lang="en-US" sz="1200" dirty="0">
+              <a:rPr lang="en-US" sz="1300" dirty="0">
                 <a:solidFill>
                   <a:srgbClr val="2C2418"/>
                 </a:solidFill>
@@ -4836,18 +4836,18 @@
               </a:rPr>
               <a:t>충전된 코인으로 감정을 뽑으면 트랜잭션 내 1코인 차감</a:t>
             </a:r>
-            <a:endParaRPr lang="en-US" sz="1200" dirty="0"/>
+            <a:endParaRPr lang="en-US" sz="1300" dirty="0"/>
           </a:p>
           <a:p>
             <a:pPr marL="342900" indent="-342900">
               <a:spcAft>
-                <a:spcPts val="600"/>
+                <a:spcPts val="800"/>
               </a:spcAft>
               <a:buSzPct val="100000"/>
               <a:buChar char="●"/>
             </a:pPr>
             <a:r>
-              <a:rPr lang="en-US" sz="1200" dirty="0">
+              <a:rPr lang="en-US" sz="1300" dirty="0">
                 <a:solidFill>
                   <a:srgbClr val="2C2418"/>
                 </a:solidFill>
@@ -4857,18 +4857,18 @@
               </a:rPr>
               <a:t>백그라운드에서 AI 감정 HTML 생성 (종합감정/년운/궁합 등)</a:t>
             </a:r>
-            <a:endParaRPr lang="en-US" sz="1200" dirty="0"/>
+            <a:endParaRPr lang="en-US" sz="1300" dirty="0"/>
           </a:p>
           <a:p>
             <a:pPr marL="342900" indent="-342900">
               <a:spcAft>
-                <a:spcPts val="600"/>
+                <a:spcPts val="800"/>
               </a:spcAft>
               <a:buSzPct val="100000"/>
               <a:buChar char="●"/>
             </a:pPr>
             <a:r>
-              <a:rPr lang="en-US" sz="1200" dirty="0">
+              <a:rPr lang="en-US" sz="1300" dirty="0">
                 <a:solidFill>
                   <a:srgbClr val="2C2418"/>
                 </a:solidFill>
@@ -4878,18 +4878,18 @@
               </a:rPr>
               <a:t>생성 완료 후 결과 페이지에서 표·섹션으로 구조화하여 표시</a:t>
             </a:r>
-            <a:endParaRPr lang="en-US" sz="1200" dirty="0"/>
+            <a:endParaRPr lang="en-US" sz="1300" dirty="0"/>
           </a:p>
           <a:p>
             <a:pPr marL="342900" indent="-342900">
               <a:spcAft>
-                <a:spcPts val="600"/>
+                <a:spcPts val="800"/>
               </a:spcAft>
               <a:buSzPct val="100000"/>
               <a:buChar char="●"/>
             </a:pPr>
             <a:r>
-              <a:rPr lang="en-US" sz="1200" dirty="0">
+              <a:rPr lang="en-US" sz="1300" dirty="0">
                 <a:solidFill>
                   <a:srgbClr val="2C2418"/>
                 </a:solidFill>
@@ -4899,7 +4899,7 @@
               </a:rPr>
               <a:t>스킬트리(/characters/{id})에서 이미 뽑은 감정 재열람 가능</a:t>
             </a:r>
-            <a:endParaRPr lang="en-US" sz="1200" dirty="0"/>
+            <a:endParaRPr lang="en-US" sz="1300" dirty="0"/>
           </a:p>
         </p:txBody>
       </p:sp>
@@ -5952,7 +5952,7 @@
         <p:spPr>
           <a:xfrm>
             <a:off x="548640" y="1737360"/>
-            <a:ext cx="6858000" cy="4480560"/>
+            <a:ext cx="2286000" cy="4754880"/>
           </a:xfrm>
           <a:prstGeom prst="rect">
             <a:avLst/>
@@ -5976,8 +5976,8 @@
         </p:nvSpPr>
         <p:spPr>
           <a:xfrm>
-            <a:off x="548640" y="3520440"/>
-            <a:ext cx="6858000" cy="365760"/>
+            <a:off x="548640" y="3657600"/>
+            <a:ext cx="2286000" cy="365760"/>
           </a:xfrm>
           <a:prstGeom prst="rect">
             <a:avLst/>
@@ -6015,8 +6015,8 @@
         </p:nvSpPr>
         <p:spPr>
           <a:xfrm>
-            <a:off x="548640" y="3931920"/>
-            <a:ext cx="6858000" cy="274320"/>
+            <a:off x="548640" y="4069080"/>
+            <a:ext cx="2286000" cy="274320"/>
           </a:xfrm>
           <a:prstGeom prst="rect">
             <a:avLst/>
@@ -6054,8 +6054,8 @@
         </p:nvSpPr>
         <p:spPr>
           <a:xfrm>
-            <a:off x="548640" y="4251960"/>
-            <a:ext cx="6858000" cy="274320"/>
+            <a:off x="548640" y="4389120"/>
+            <a:ext cx="2286000" cy="274320"/>
           </a:xfrm>
           <a:prstGeom prst="rect">
             <a:avLst/>
@@ -6093,8 +6093,8 @@
         </p:nvSpPr>
         <p:spPr>
           <a:xfrm>
-            <a:off x="7680960" y="1737360"/>
-            <a:ext cx="4023360" cy="274320"/>
+            <a:off x="3200400" y="1737360"/>
+            <a:ext cx="8503920" cy="274320"/>
           </a:xfrm>
           <a:prstGeom prst="rect">
             <a:avLst/>
@@ -6134,8 +6134,8 @@
         </p:nvSpPr>
         <p:spPr>
           <a:xfrm>
-            <a:off x="7680960" y="2011680"/>
-            <a:ext cx="4023360" cy="365760"/>
+            <a:off x="3200400" y="2011680"/>
+            <a:ext cx="8503920" cy="365760"/>
           </a:xfrm>
           <a:prstGeom prst="rect">
             <a:avLst/>
@@ -6151,7 +6151,7 @@
               <a:buNone/>
             </a:pPr>
             <a:r>
-              <a:rPr lang="en-US" sz="1200" u="sng" dirty="0">
+              <a:rPr lang="en-US" sz="1300" u="sng" dirty="0">
                 <a:solidFill>
                   <a:srgbClr val="2C2418"/>
                 </a:solidFill>
@@ -6168,7 +6168,7 @@
               </a:rPr>
               <a:t>https://gatch-saju.onato.co.kr/mypage</a:t>
             </a:r>
-            <a:endParaRPr lang="en-US" sz="1200" dirty="0"/>
+            <a:endParaRPr lang="en-US" sz="1300" dirty="0"/>
           </a:p>
         </p:txBody>
       </p:sp>
@@ -6180,8 +6180,8 @@
         </p:nvSpPr>
         <p:spPr>
           <a:xfrm>
-            <a:off x="7680960" y="2560320"/>
-            <a:ext cx="4023360" cy="0"/>
+            <a:off x="3200400" y="2560320"/>
+            <a:ext cx="8503920" cy="0"/>
           </a:xfrm>
           <a:prstGeom prst="line">
             <a:avLst/>
@@ -6203,8 +6203,8 @@
         </p:nvSpPr>
         <p:spPr>
           <a:xfrm>
-            <a:off x="7680960" y="2743200"/>
-            <a:ext cx="4023360" cy="274320"/>
+            <a:off x="3200400" y="2743200"/>
+            <a:ext cx="8503920" cy="274320"/>
           </a:xfrm>
           <a:prstGeom prst="rect">
             <a:avLst/>
@@ -6242,8 +6242,8 @@
         </p:nvSpPr>
         <p:spPr>
           <a:xfrm>
-            <a:off x="7680960" y="3017520"/>
-            <a:ext cx="4023360" cy="3200400"/>
+            <a:off x="3200400" y="3017520"/>
+            <a:ext cx="8503920" cy="3200400"/>
           </a:xfrm>
           <a:prstGeom prst="rect">
             <a:avLst/>
@@ -6257,13 +6257,13 @@
           <a:p>
             <a:pPr marL="342900" indent="-342900">
               <a:spcAft>
-                <a:spcPts val="600"/>
+                <a:spcPts val="800"/>
               </a:spcAft>
               <a:buSzPct val="100000"/>
               <a:buChar char="●"/>
             </a:pPr>
             <a:r>
-              <a:rPr lang="en-US" sz="1200" dirty="0">
+              <a:rPr lang="en-US" sz="1300" dirty="0">
                 <a:solidFill>
                   <a:srgbClr val="2C2418"/>
                 </a:solidFill>
@@ -6273,18 +6273,18 @@
               </a:rPr>
               <a:t>마이페이지 → 지갑 섹션 내 "환불 요청" 링크</a:t>
             </a:r>
-            <a:endParaRPr lang="en-US" sz="1200" dirty="0"/>
+            <a:endParaRPr lang="en-US" sz="1300" dirty="0"/>
           </a:p>
           <a:p>
             <a:pPr marL="342900" indent="-342900">
               <a:spcAft>
-                <a:spcPts val="600"/>
+                <a:spcPts val="800"/>
               </a:spcAft>
               <a:buSzPct val="100000"/>
               <a:buChar char="●"/>
             </a:pPr>
             <a:r>
-              <a:rPr lang="en-US" sz="1200" dirty="0">
+              <a:rPr lang="en-US" sz="1300" dirty="0">
                 <a:solidFill>
                   <a:srgbClr val="2C2418"/>
                 </a:solidFill>
@@ -6294,18 +6294,18 @@
               </a:rPr>
               <a:t>클릭 시 프리필된 이메일 양식 자동 작성 (가입 이메일·이름 포함)</a:t>
             </a:r>
-            <a:endParaRPr lang="en-US" sz="1200" dirty="0"/>
+            <a:endParaRPr lang="en-US" sz="1300" dirty="0"/>
           </a:p>
           <a:p>
             <a:pPr marL="342900" indent="-342900">
               <a:spcAft>
-                <a:spcPts val="600"/>
+                <a:spcPts val="800"/>
               </a:spcAft>
               <a:buSzPct val="100000"/>
               <a:buChar char="●"/>
             </a:pPr>
             <a:r>
-              <a:rPr lang="en-US" sz="1200" dirty="0">
+              <a:rPr lang="en-US" sz="1300" dirty="0">
                 <a:solidFill>
                   <a:srgbClr val="2C2418"/>
                 </a:solidFill>
@@ -6315,18 +6315,18 @@
               </a:rPr>
               <a:t>고객센터 접수 후 /api/payments/cancel 호출</a:t>
             </a:r>
-            <a:endParaRPr lang="en-US" sz="1200" dirty="0"/>
+            <a:endParaRPr lang="en-US" sz="1300" dirty="0"/>
           </a:p>
           <a:p>
             <a:pPr marL="342900" indent="-342900">
               <a:spcAft>
-                <a:spcPts val="600"/>
+                <a:spcPts val="800"/>
               </a:spcAft>
               <a:buSzPct val="100000"/>
               <a:buChar char="●"/>
             </a:pPr>
             <a:r>
-              <a:rPr lang="en-US" sz="1200" dirty="0">
+              <a:rPr lang="en-US" sz="1300" dirty="0">
                 <a:solidFill>
                   <a:srgbClr val="2C2418"/>
                 </a:solidFill>
@@ -6336,7 +6336,7 @@
               </a:rPr>
               <a:t>Toss cancelPayment API로 부분·전액 환불 처리 → 결제 수단 원복</a:t>
             </a:r>
-            <a:endParaRPr lang="en-US" sz="1200" dirty="0"/>
+            <a:endParaRPr lang="en-US" sz="1300" dirty="0"/>
           </a:p>
         </p:txBody>
       </p:sp>
@@ -10550,134 +10550,79 @@
         <p:spPr>
           <a:xfrm>
             <a:off x="548640" y="1737360"/>
-            <a:ext cx="6858000" cy="4480560"/>
+            <a:ext cx="2286000" cy="4754880"/>
           </a:xfrm>
           <a:prstGeom prst="rect">
             <a:avLst/>
           </a:prstGeom>
           <a:solidFill>
-            <a:srgbClr val="E8E0D0"/>
+            <a:srgbClr val="FFFFFF"/>
           </a:solidFill>
           <a:ln w="12700">
             <a:solidFill>
               <a:srgbClr val="D4B070"/>
             </a:solidFill>
-            <a:prstDash val="dash"/>
+            <a:prstDash val="solid"/>
           </a:ln>
         </p:spPr>
       </p:sp>
-      <p:sp>
-        <p:nvSpPr>
-          <p:cNvPr id="5" name="Text 3"/>
-          <p:cNvSpPr/>
-          <p:nvPr/>
-        </p:nvSpPr>
-        <p:spPr>
-          <a:xfrm>
-            <a:off x="548640" y="3520440"/>
-            <a:ext cx="6858000" cy="365760"/>
-          </a:xfrm>
-          <a:prstGeom prst="rect">
-            <a:avLst/>
-          </a:prstGeom>
-          <a:noFill/>
-          <a:ln/>
-        </p:spPr>
-        <p:txBody>
-          <a:bodyPr wrap="square" rtlCol="0" anchor="ctr"/>
-          <a:lstStyle/>
-          <a:p>
-            <a:pPr algn="ctr" indent="0" marL="0">
-              <a:buNone/>
-            </a:pPr>
-            <a:r>
-              <a:rPr lang="en-US" sz="1600" b="1" dirty="0">
-                <a:solidFill>
-                  <a:srgbClr val="A89878"/>
-                </a:solidFill>
-                <a:latin typeface="Malgun Gothic" pitchFamily="34" charset="0"/>
-                <a:ea typeface="Malgun Gothic" pitchFamily="34" charset="-122"/>
-                <a:cs typeface="Malgun Gothic" pitchFamily="34" charset="-120"/>
-              </a:rPr>
-              <a:t>여기에 스크린샷 삽입</a:t>
-            </a:r>
-            <a:endParaRPr lang="en-US" sz="1600" dirty="0"/>
-          </a:p>
-        </p:txBody>
-      </p:sp>
-      <p:sp>
-        <p:nvSpPr>
-          <p:cNvPr id="6" name="Text 4"/>
-          <p:cNvSpPr/>
-          <p:nvPr/>
-        </p:nvSpPr>
-        <p:spPr>
-          <a:xfrm>
-            <a:off x="548640" y="3931920"/>
-            <a:ext cx="6858000" cy="274320"/>
-          </a:xfrm>
-          <a:prstGeom prst="rect">
-            <a:avLst/>
-          </a:prstGeom>
-          <a:noFill/>
-          <a:ln/>
-        </p:spPr>
-        <p:txBody>
-          <a:bodyPr wrap="square" rtlCol="0" anchor="ctr"/>
-          <a:lstStyle/>
-          <a:p>
-            <a:pPr algn="ctr" indent="0" marL="0">
-              <a:buNone/>
-            </a:pPr>
-            <a:r>
-              <a:rPr lang="en-US" sz="1100" i="1" dirty="0">
-                <a:solidFill>
-                  <a:srgbClr val="A89878"/>
-                </a:solidFill>
-                <a:latin typeface="Malgun Gothic" pitchFamily="34" charset="0"/>
-                <a:ea typeface="Malgun Gothic" pitchFamily="34" charset="-122"/>
-                <a:cs typeface="Malgun Gothic" pitchFamily="34" charset="-120"/>
-              </a:rPr>
-              <a:t>https://gatch-saju.onato.co.kr/landing</a:t>
-            </a:r>
-            <a:endParaRPr lang="en-US" sz="1100" dirty="0"/>
-          </a:p>
-        </p:txBody>
-      </p:sp>
-      <p:sp>
-        <p:nvSpPr>
-          <p:cNvPr id="7" name="Text 5"/>
-          <p:cNvSpPr/>
-          <p:nvPr/>
-        </p:nvSpPr>
-        <p:spPr>
-          <a:xfrm>
-            <a:off x="548640" y="4251960"/>
-            <a:ext cx="6858000" cy="274320"/>
-          </a:xfrm>
-          <a:prstGeom prst="rect">
-            <a:avLst/>
-          </a:prstGeom>
-          <a:noFill/>
-          <a:ln/>
-        </p:spPr>
-        <p:txBody>
-          <a:bodyPr wrap="square" rtlCol="0" anchor="ctr"/>
-          <a:lstStyle/>
-          <a:p>
-            <a:pPr algn="ctr" indent="0" marL="0">
-              <a:buNone/>
-            </a:pPr>
-            <a:r>
-              <a:rPr lang="en-US" sz="1000" dirty="0">
-                <a:solidFill>
-                  <a:srgbClr val="A89878"/>
-                </a:solidFill>
-                <a:latin typeface="Malgun Gothic" pitchFamily="34" charset="0"/>
-                <a:ea typeface="Malgun Gothic" pitchFamily="34" charset="-122"/>
-                <a:cs typeface="Malgun Gothic" pitchFamily="34" charset="-120"/>
-              </a:rPr>
-              <a:t>(1200 × 900 권장 · 프로덕션에서 실제 화면 캡처)</a:t>
+      <p:pic>
+        <p:nvPicPr>
+          <p:cNvPr id="5" name="Image 0" descr="/Users/kyun/Desktop/project/fortune_imgessage/docs/screenshots/05-landing.png">    </p:cNvPr>
+          <p:cNvPicPr>
+            <a:picLocks noChangeAspect="1"/>
+          </p:cNvPicPr>
+          <p:nvPr/>
+        </p:nvPicPr>
+        <p:blipFill>
+          <a:blip r:embed="rId1"/>
+          <a:srcRect l="0" r="0" t="0" b="0"/>
+          <a:stretch/>
+        </p:blipFill>
+        <p:spPr>
+          <a:xfrm>
+            <a:off x="548640" y="1737360"/>
+            <a:ext cx="2286000" cy="4754880"/>
+          </a:xfrm>
+          <a:prstGeom prst="rect">
+            <a:avLst/>
+          </a:prstGeom>
+        </p:spPr>
+      </p:pic>
+      <p:sp>
+        <p:nvSpPr>
+          <p:cNvPr id="6" name="Text 3"/>
+          <p:cNvSpPr/>
+          <p:nvPr/>
+        </p:nvSpPr>
+        <p:spPr>
+          <a:xfrm>
+            <a:off x="3200400" y="1737360"/>
+            <a:ext cx="8503920" cy="274320"/>
+          </a:xfrm>
+          <a:prstGeom prst="rect">
+            <a:avLst/>
+          </a:prstGeom>
+          <a:noFill/>
+          <a:ln/>
+        </p:spPr>
+        <p:txBody>
+          <a:bodyPr wrap="square" rtlCol="0" anchor="ctr"/>
+          <a:lstStyle/>
+          <a:p>
+            <a:pPr indent="0" marL="0">
+              <a:buNone/>
+            </a:pPr>
+            <a:r>
+              <a:rPr lang="en-US" sz="1000" b="1" spc="300" kern="0" dirty="0">
+                <a:solidFill>
+                  <a:srgbClr val="9A7040"/>
+                </a:solidFill>
+                <a:latin typeface="Malgun Gothic" pitchFamily="34" charset="0"/>
+                <a:ea typeface="Malgun Gothic" pitchFamily="34" charset="-122"/>
+                <a:cs typeface="Malgun Gothic" pitchFamily="34" charset="-120"/>
+              </a:rPr>
+              <a:t>URL</a:t>
             </a:r>
             <a:endParaRPr lang="en-US" sz="1000" dirty="0"/>
           </a:p>
@@ -10685,14 +10630,16 @@
       </p:sp>
       <p:sp>
         <p:nvSpPr>
-          <p:cNvPr id="8" name="Text 6"/>
-          <p:cNvSpPr/>
-          <p:nvPr/>
-        </p:nvSpPr>
-        <p:spPr>
-          <a:xfrm>
-            <a:off x="7680960" y="1737360"/>
-            <a:ext cx="4023360" cy="274320"/>
+          <p:cNvPr id="7" name="Text 4">
+            <a:hlinkClick r:id="rId2" tooltip=""/>
+          </p:cNvPr>
+          <p:cNvSpPr/>
+          <p:nvPr/>
+        </p:nvSpPr>
+        <p:spPr>
+          <a:xfrm>
+            <a:off x="3200400" y="2011680"/>
+            <a:ext cx="8503920" cy="365760"/>
           </a:xfrm>
           <a:prstGeom prst="rect">
             <a:avLst/>
@@ -10708,55 +10655,14 @@
               <a:buNone/>
             </a:pPr>
             <a:r>
-              <a:rPr lang="en-US" sz="1000" b="1" spc="300" kern="0" dirty="0">
-                <a:solidFill>
-                  <a:srgbClr val="9A7040"/>
-                </a:solidFill>
-                <a:latin typeface="Malgun Gothic" pitchFamily="34" charset="0"/>
-                <a:ea typeface="Malgun Gothic" pitchFamily="34" charset="-122"/>
-                <a:cs typeface="Malgun Gothic" pitchFamily="34" charset="-120"/>
-              </a:rPr>
-              <a:t>URL</a:t>
-            </a:r>
-            <a:endParaRPr lang="en-US" sz="1000" dirty="0"/>
-          </a:p>
-        </p:txBody>
-      </p:sp>
-      <p:sp>
-        <p:nvSpPr>
-          <p:cNvPr id="9" name="Text 7">
-            <a:hlinkClick r:id="rId1" tooltip=""/>
-          </p:cNvPr>
-          <p:cNvSpPr/>
-          <p:nvPr/>
-        </p:nvSpPr>
-        <p:spPr>
-          <a:xfrm>
-            <a:off x="7680960" y="2011680"/>
-            <a:ext cx="4023360" cy="365760"/>
-          </a:xfrm>
-          <a:prstGeom prst="rect">
-            <a:avLst/>
-          </a:prstGeom>
-          <a:noFill/>
-          <a:ln/>
-        </p:spPr>
-        <p:txBody>
-          <a:bodyPr wrap="square" rtlCol="0" anchor="ctr"/>
-          <a:lstStyle/>
-          <a:p>
-            <a:pPr indent="0" marL="0">
-              <a:buNone/>
-            </a:pPr>
-            <a:r>
-              <a:rPr lang="en-US" sz="1200" u="sng" dirty="0">
+              <a:rPr lang="en-US" sz="1300" u="sng" dirty="0">
                 <a:solidFill>
                   <a:srgbClr val="2C2418"/>
                 </a:solidFill>
                 <a:latin typeface="Malgun Gothic" pitchFamily="34" charset="0"/>
                 <a:ea typeface="Malgun Gothic" pitchFamily="34" charset="-122"/>
                 <a:cs typeface="Malgun Gothic" pitchFamily="34" charset="-120"/>
-                <a:hlinkClick r:id="rId1" invalidUrl="" action="" tgtFrame="" tooltip="" history="1" highlightClick="0" endSnd="0">
+                <a:hlinkClick r:id="rId2" invalidUrl="" action="" tgtFrame="" tooltip="" history="1" highlightClick="0" endSnd="0">
                   <a:extLst>
                     <a:ext uri="{A12FA001-AC4F-418D-AE19-62706E023703}">
                       <ahyp:hlinkClr xmlns:ahyp="http://schemas.microsoft.com/office/drawing/2018/hyperlinkcolor" val="tx"/>
@@ -10766,20 +10672,20 @@
               </a:rPr>
               <a:t>https://gatch-saju.onato.co.kr/landing</a:t>
             </a:r>
-            <a:endParaRPr lang="en-US" sz="1200" dirty="0"/>
-          </a:p>
-        </p:txBody>
-      </p:sp>
-      <p:sp>
-        <p:nvSpPr>
-          <p:cNvPr id="10" name="Shape 8"/>
-          <p:cNvSpPr/>
-          <p:nvPr/>
-        </p:nvSpPr>
-        <p:spPr>
-          <a:xfrm>
-            <a:off x="7680960" y="2560320"/>
-            <a:ext cx="4023360" cy="0"/>
+            <a:endParaRPr lang="en-US" sz="1300" dirty="0"/>
+          </a:p>
+        </p:txBody>
+      </p:sp>
+      <p:sp>
+        <p:nvSpPr>
+          <p:cNvPr id="8" name="Shape 5"/>
+          <p:cNvSpPr/>
+          <p:nvPr/>
+        </p:nvSpPr>
+        <p:spPr>
+          <a:xfrm>
+            <a:off x="3200400" y="2560320"/>
+            <a:ext cx="8503920" cy="0"/>
           </a:xfrm>
           <a:prstGeom prst="line">
             <a:avLst/>
@@ -10795,14 +10701,14 @@
       </p:sp>
       <p:sp>
         <p:nvSpPr>
-          <p:cNvPr id="11" name="Text 9"/>
-          <p:cNvSpPr/>
-          <p:nvPr/>
-        </p:nvSpPr>
-        <p:spPr>
-          <a:xfrm>
-            <a:off x="7680960" y="2743200"/>
-            <a:ext cx="4023360" cy="274320"/>
+          <p:cNvPr id="9" name="Text 6"/>
+          <p:cNvSpPr/>
+          <p:nvPr/>
+        </p:nvSpPr>
+        <p:spPr>
+          <a:xfrm>
+            <a:off x="3200400" y="2743200"/>
+            <a:ext cx="8503920" cy="274320"/>
           </a:xfrm>
           <a:prstGeom prst="rect">
             <a:avLst/>
@@ -10834,14 +10740,14 @@
       </p:sp>
       <p:sp>
         <p:nvSpPr>
-          <p:cNvPr id="12" name="Text 10"/>
-          <p:cNvSpPr/>
-          <p:nvPr/>
-        </p:nvSpPr>
-        <p:spPr>
-          <a:xfrm>
-            <a:off x="7680960" y="3017520"/>
-            <a:ext cx="4023360" cy="3200400"/>
+          <p:cNvPr id="10" name="Text 7"/>
+          <p:cNvSpPr/>
+          <p:nvPr/>
+        </p:nvSpPr>
+        <p:spPr>
+          <a:xfrm>
+            <a:off x="3200400" y="3017520"/>
+            <a:ext cx="8503920" cy="3200400"/>
           </a:xfrm>
           <a:prstGeom prst="rect">
             <a:avLst/>
@@ -10855,13 +10761,13 @@
           <a:p>
             <a:pPr marL="342900" indent="-342900">
               <a:spcAft>
-                <a:spcPts val="600"/>
+                <a:spcPts val="800"/>
               </a:spcAft>
               <a:buSzPct val="100000"/>
               <a:buChar char="●"/>
             </a:pPr>
             <a:r>
-              <a:rPr lang="en-US" sz="1200" dirty="0">
+              <a:rPr lang="en-US" sz="1300" dirty="0">
                 <a:solidFill>
                   <a:srgbClr val="2C2418"/>
                 </a:solidFill>
@@ -10871,18 +10777,18 @@
               </a:rPr>
               <a:t>비로그인 방문자가 처음 보는 화면</a:t>
             </a:r>
-            <a:endParaRPr lang="en-US" sz="1200" dirty="0"/>
+            <a:endParaRPr lang="en-US" sz="1300" dirty="0"/>
           </a:p>
           <a:p>
             <a:pPr marL="342900" indent="-342900">
               <a:spcAft>
-                <a:spcPts val="600"/>
+                <a:spcPts val="800"/>
               </a:spcAft>
               <a:buSzPct val="100000"/>
               <a:buChar char="●"/>
             </a:pPr>
             <a:r>
-              <a:rPr lang="en-US" sz="1200" dirty="0">
+              <a:rPr lang="en-US" sz="1300" dirty="0">
                 <a:solidFill>
                   <a:srgbClr val="2C2418"/>
                 </a:solidFill>
@@ -10892,18 +10798,18 @@
               </a:rPr>
               <a:t>서비스 소개 + 카카오 로그인 CTA</a:t>
             </a:r>
-            <a:endParaRPr lang="en-US" sz="1200" dirty="0"/>
+            <a:endParaRPr lang="en-US" sz="1300" dirty="0"/>
           </a:p>
           <a:p>
             <a:pPr marL="342900" indent="-342900">
               <a:spcAft>
-                <a:spcPts val="600"/>
+                <a:spcPts val="800"/>
               </a:spcAft>
               <a:buSzPct val="100000"/>
               <a:buChar char="●"/>
             </a:pPr>
             <a:r>
-              <a:rPr lang="en-US" sz="1200" dirty="0">
+              <a:rPr lang="en-US" sz="1300" dirty="0">
                 <a:solidFill>
                   <a:srgbClr val="2C2418"/>
                 </a:solidFill>
@@ -10913,13 +10819,13 @@
               </a:rPr>
               <a:t>하단에 "요금 안내" 링크로 상품 페이지 진입 가능</a:t>
             </a:r>
-            <a:endParaRPr lang="en-US" sz="1200" dirty="0"/>
-          </a:p>
-        </p:txBody>
-      </p:sp>
-      <p:sp>
-        <p:nvSpPr>
-          <p:cNvPr id="13" name="Text 11"/>
+            <a:endParaRPr lang="en-US" sz="1300" dirty="0"/>
+          </a:p>
+        </p:txBody>
+      </p:sp>
+      <p:sp>
+        <p:nvSpPr>
+          <p:cNvPr id="11" name="Text 8"/>
           <p:cNvSpPr/>
           <p:nvPr/>
         </p:nvSpPr>
@@ -10958,7 +10864,7 @@
       </p:sp>
       <p:sp>
         <p:nvSpPr>
-          <p:cNvPr id="14" name="Text 12"/>
+          <p:cNvPr id="12" name="Text 9"/>
           <p:cNvSpPr/>
           <p:nvPr/>
         </p:nvSpPr>
@@ -11114,89 +11020,112 @@
         <p:spPr>
           <a:xfrm>
             <a:off x="548640" y="1737360"/>
-            <a:ext cx="6217920" cy="4480560"/>
+            <a:ext cx="2286000" cy="4754880"/>
           </a:xfrm>
           <a:prstGeom prst="rect">
             <a:avLst/>
           </a:prstGeom>
           <a:solidFill>
-            <a:srgbClr val="E8E0D0"/>
+            <a:srgbClr val="FFFFFF"/>
           </a:solidFill>
           <a:ln w="12700">
             <a:solidFill>
               <a:srgbClr val="D4B070"/>
             </a:solidFill>
-            <a:prstDash val="dash"/>
+            <a:prstDash val="solid"/>
           </a:ln>
         </p:spPr>
       </p:sp>
-      <p:sp>
-        <p:nvSpPr>
-          <p:cNvPr id="5" name="Text 3"/>
-          <p:cNvSpPr/>
-          <p:nvPr/>
-        </p:nvSpPr>
-        <p:spPr>
-          <a:xfrm>
-            <a:off x="548640" y="3520440"/>
-            <a:ext cx="6217920" cy="365760"/>
-          </a:xfrm>
-          <a:prstGeom prst="rect">
-            <a:avLst/>
-          </a:prstGeom>
-          <a:noFill/>
-          <a:ln/>
-        </p:spPr>
-        <p:txBody>
-          <a:bodyPr wrap="square" rtlCol="0" anchor="ctr"/>
-          <a:lstStyle/>
-          <a:p>
-            <a:pPr algn="ctr" indent="0" marL="0">
-              <a:buNone/>
-            </a:pPr>
-            <a:r>
-              <a:rPr lang="en-US" sz="1600" b="1" dirty="0">
-                <a:solidFill>
-                  <a:srgbClr val="A89878"/>
-                </a:solidFill>
-                <a:latin typeface="Malgun Gothic" pitchFamily="34" charset="0"/>
-                <a:ea typeface="Malgun Gothic" pitchFamily="34" charset="-122"/>
-                <a:cs typeface="Malgun Gothic" pitchFamily="34" charset="-120"/>
-              </a:rPr>
-              <a:t>여기에 스크린샷 삽입</a:t>
-            </a:r>
-            <a:endParaRPr lang="en-US" sz="1600" dirty="0"/>
-          </a:p>
-        </p:txBody>
-      </p:sp>
-      <p:sp>
-        <p:nvSpPr>
-          <p:cNvPr id="6" name="Text 4"/>
-          <p:cNvSpPr/>
-          <p:nvPr/>
-        </p:nvSpPr>
-        <p:spPr>
-          <a:xfrm>
-            <a:off x="548640" y="3931920"/>
-            <a:ext cx="6217920" cy="274320"/>
-          </a:xfrm>
-          <a:prstGeom prst="rect">
-            <a:avLst/>
-          </a:prstGeom>
-          <a:noFill/>
-          <a:ln/>
-        </p:spPr>
-        <p:txBody>
-          <a:bodyPr wrap="square" rtlCol="0" anchor="ctr"/>
-          <a:lstStyle/>
-          <a:p>
-            <a:pPr algn="ctr" indent="0" marL="0">
-              <a:buNone/>
-            </a:pPr>
-            <a:r>
-              <a:rPr lang="en-US" sz="1100" i="1" dirty="0">
-                <a:solidFill>
-                  <a:srgbClr val="A89878"/>
+      <p:pic>
+        <p:nvPicPr>
+          <p:cNvPr id="5" name="Image 0" descr="/Users/kyun/Desktop/project/fortune_imgessage/docs/screenshots/06-pricing.png">    </p:cNvPr>
+          <p:cNvPicPr>
+            <a:picLocks noChangeAspect="1"/>
+          </p:cNvPicPr>
+          <p:nvPr/>
+        </p:nvPicPr>
+        <p:blipFill>
+          <a:blip r:embed="rId1"/>
+          <a:srcRect l="0" r="0" t="0" b="0"/>
+          <a:stretch/>
+        </p:blipFill>
+        <p:spPr>
+          <a:xfrm>
+            <a:off x="548640" y="1737360"/>
+            <a:ext cx="2286000" cy="4754880"/>
+          </a:xfrm>
+          <a:prstGeom prst="rect">
+            <a:avLst/>
+          </a:prstGeom>
+        </p:spPr>
+      </p:pic>
+      <p:sp>
+        <p:nvSpPr>
+          <p:cNvPr id="6" name="Text 3"/>
+          <p:cNvSpPr/>
+          <p:nvPr/>
+        </p:nvSpPr>
+        <p:spPr>
+          <a:xfrm>
+            <a:off x="3200400" y="1737360"/>
+            <a:ext cx="8503920" cy="274320"/>
+          </a:xfrm>
+          <a:prstGeom prst="rect">
+            <a:avLst/>
+          </a:prstGeom>
+          <a:noFill/>
+          <a:ln/>
+        </p:spPr>
+        <p:txBody>
+          <a:bodyPr wrap="square" rtlCol="0" anchor="ctr"/>
+          <a:lstStyle/>
+          <a:p>
+            <a:pPr indent="0" marL="0">
+              <a:buNone/>
+            </a:pPr>
+            <a:r>
+              <a:rPr lang="en-US" sz="1000" b="1" spc="300" kern="0" dirty="0">
+                <a:solidFill>
+                  <a:srgbClr val="9A7040"/>
+                </a:solidFill>
+                <a:latin typeface="Malgun Gothic" pitchFamily="34" charset="0"/>
+                <a:ea typeface="Malgun Gothic" pitchFamily="34" charset="-122"/>
+                <a:cs typeface="Malgun Gothic" pitchFamily="34" charset="-120"/>
+              </a:rPr>
+              <a:t>URL</a:t>
+            </a:r>
+            <a:endParaRPr lang="en-US" sz="1000" dirty="0"/>
+          </a:p>
+        </p:txBody>
+      </p:sp>
+      <p:sp>
+        <p:nvSpPr>
+          <p:cNvPr id="7" name="Text 4"/>
+          <p:cNvSpPr/>
+          <p:nvPr/>
+        </p:nvSpPr>
+        <p:spPr>
+          <a:xfrm>
+            <a:off x="3200400" y="2011680"/>
+            <a:ext cx="8503920" cy="365760"/>
+          </a:xfrm>
+          <a:prstGeom prst="rect">
+            <a:avLst/>
+          </a:prstGeom>
+          <a:noFill/>
+          <a:ln/>
+        </p:spPr>
+        <p:txBody>
+          <a:bodyPr wrap="square" rtlCol="0" anchor="ctr"/>
+          <a:lstStyle/>
+          <a:p>
+            <a:pPr indent="0" marL="0">
+              <a:buNone/>
+            </a:pPr>
+            <a:r>
+              <a:rPr lang="en-US" sz="1300" dirty="0">
+                <a:solidFill>
+                  <a:srgbClr val="2C2418"/>
                 </a:solidFill>
                 <a:latin typeface="Malgun Gothic" pitchFamily="34" charset="0"/>
                 <a:ea typeface="Malgun Gothic" pitchFamily="34" charset="-122"/>
@@ -11204,137 +11133,43 @@
               </a:rPr>
               <a:t>https://gatch-saju.onato.co.kr/pricing</a:t>
             </a:r>
-            <a:endParaRPr lang="en-US" sz="1100" dirty="0"/>
-          </a:p>
-        </p:txBody>
-      </p:sp>
-      <p:sp>
-        <p:nvSpPr>
-          <p:cNvPr id="7" name="Text 5"/>
-          <p:cNvSpPr/>
-          <p:nvPr/>
-        </p:nvSpPr>
-        <p:spPr>
-          <a:xfrm>
-            <a:off x="548640" y="4251960"/>
-            <a:ext cx="6217920" cy="274320"/>
-          </a:xfrm>
-          <a:prstGeom prst="rect">
-            <a:avLst/>
-          </a:prstGeom>
-          <a:noFill/>
-          <a:ln/>
-        </p:spPr>
-        <p:txBody>
-          <a:bodyPr wrap="square" rtlCol="0" anchor="ctr"/>
-          <a:lstStyle/>
-          <a:p>
-            <a:pPr algn="ctr" indent="0" marL="0">
-              <a:buNone/>
-            </a:pPr>
-            <a:r>
-              <a:rPr lang="en-US" sz="1000" dirty="0">
-                <a:solidFill>
-                  <a:srgbClr val="A89878"/>
-                </a:solidFill>
-                <a:latin typeface="Malgun Gothic" pitchFamily="34" charset="0"/>
-                <a:ea typeface="Malgun Gothic" pitchFamily="34" charset="-122"/>
-                <a:cs typeface="Malgun Gothic" pitchFamily="34" charset="-120"/>
-              </a:rPr>
-              <a:t>(1200 × 900 권장 · 프로덕션에서 실제 화면 캡처)</a:t>
-            </a:r>
-            <a:endParaRPr lang="en-US" sz="1000" dirty="0"/>
-          </a:p>
-        </p:txBody>
-      </p:sp>
-      <p:sp>
-        <p:nvSpPr>
-          <p:cNvPr id="8" name="Text 6"/>
-          <p:cNvSpPr/>
-          <p:nvPr/>
-        </p:nvSpPr>
-        <p:spPr>
-          <a:xfrm>
-            <a:off x="7040880" y="1737360"/>
-            <a:ext cx="4663440" cy="274320"/>
-          </a:xfrm>
-          <a:prstGeom prst="rect">
-            <a:avLst/>
-          </a:prstGeom>
-          <a:noFill/>
-          <a:ln/>
-        </p:spPr>
-        <p:txBody>
-          <a:bodyPr wrap="square" rtlCol="0" anchor="ctr"/>
-          <a:lstStyle/>
-          <a:p>
-            <a:pPr indent="0" marL="0">
-              <a:buNone/>
-            </a:pPr>
-            <a:r>
-              <a:rPr lang="en-US" sz="1000" b="1" spc="300" kern="0" dirty="0">
-                <a:solidFill>
-                  <a:srgbClr val="9A7040"/>
-                </a:solidFill>
-                <a:latin typeface="Malgun Gothic" pitchFamily="34" charset="0"/>
-                <a:ea typeface="Malgun Gothic" pitchFamily="34" charset="-122"/>
-                <a:cs typeface="Malgun Gothic" pitchFamily="34" charset="-120"/>
-              </a:rPr>
-              <a:t>URL</a:t>
-            </a:r>
-            <a:endParaRPr lang="en-US" sz="1000" dirty="0"/>
-          </a:p>
-        </p:txBody>
-      </p:sp>
-      <p:sp>
-        <p:nvSpPr>
-          <p:cNvPr id="9" name="Text 7"/>
-          <p:cNvSpPr/>
-          <p:nvPr/>
-        </p:nvSpPr>
-        <p:spPr>
-          <a:xfrm>
-            <a:off x="7040880" y="2011680"/>
-            <a:ext cx="4663440" cy="365760"/>
-          </a:xfrm>
-          <a:prstGeom prst="rect">
-            <a:avLst/>
-          </a:prstGeom>
-          <a:noFill/>
-          <a:ln/>
-        </p:spPr>
-        <p:txBody>
-          <a:bodyPr wrap="square" rtlCol="0" anchor="ctr"/>
-          <a:lstStyle/>
-          <a:p>
-            <a:pPr indent="0" marL="0">
-              <a:buNone/>
-            </a:pPr>
-            <a:r>
-              <a:rPr lang="en-US" sz="1200" dirty="0">
-                <a:solidFill>
-                  <a:srgbClr val="2C2418"/>
-                </a:solidFill>
-                <a:latin typeface="Malgun Gothic" pitchFamily="34" charset="0"/>
-                <a:ea typeface="Malgun Gothic" pitchFamily="34" charset="-122"/>
-                <a:cs typeface="Malgun Gothic" pitchFamily="34" charset="-120"/>
-              </a:rPr>
-              <a:t>https://gatch-saju.onato.co.kr/pricing</a:t>
-            </a:r>
-            <a:endParaRPr lang="en-US" sz="1200" dirty="0"/>
-          </a:p>
-        </p:txBody>
-      </p:sp>
-      <p:sp>
-        <p:nvSpPr>
-          <p:cNvPr id="10" name="Text 8"/>
-          <p:cNvSpPr/>
-          <p:nvPr/>
-        </p:nvSpPr>
-        <p:spPr>
-          <a:xfrm>
-            <a:off x="7040880" y="2560320"/>
-            <a:ext cx="4663440" cy="274320"/>
+            <a:endParaRPr lang="en-US" sz="1300" dirty="0"/>
+          </a:p>
+        </p:txBody>
+      </p:sp>
+      <p:sp>
+        <p:nvSpPr>
+          <p:cNvPr id="8" name="Shape 5"/>
+          <p:cNvSpPr/>
+          <p:nvPr/>
+        </p:nvSpPr>
+        <p:spPr>
+          <a:xfrm>
+            <a:off x="3200400" y="2560320"/>
+            <a:ext cx="8503920" cy="0"/>
+          </a:xfrm>
+          <a:prstGeom prst="line">
+            <a:avLst/>
+          </a:prstGeom>
+          <a:noFill/>
+          <a:ln w="12700">
+            <a:solidFill>
+              <a:srgbClr val="D4B070"/>
+            </a:solidFill>
+            <a:prstDash val="solid"/>
+          </a:ln>
+        </p:spPr>
+      </p:sp>
+      <p:sp>
+        <p:nvSpPr>
+          <p:cNvPr id="9" name="Text 6"/>
+          <p:cNvSpPr/>
+          <p:nvPr/>
+        </p:nvSpPr>
+        <p:spPr>
+          <a:xfrm>
+            <a:off x="3200400" y="2743200"/>
+            <a:ext cx="8503920" cy="274320"/>
           </a:xfrm>
           <a:prstGeom prst="rect">
             <a:avLst/>
@@ -11379,19 +11214,19 @@
           </p:nvPr>
         </p:nvGraphicFramePr>
         <p:xfrm>
-          <a:off x="7040880" y="2834640"/>
-          <a:ext cx="4663440" cy="914400"/>
+          <a:off x="3200400" y="3108960"/>
+          <a:ext cx="5486400" cy="914400"/>
         </p:xfrm>
         <a:graphic>
           <a:graphicData uri="http://schemas.openxmlformats.org/drawingml/2006/table">
             <a:tbl>
               <a:tblPr/>
               <a:tblGrid>
-                <a:gridCol w="1371600"/>
-                <a:gridCol w="1828800"/>
-                <a:gridCol w="1463040"/>
+                <a:gridCol w="1645920"/>
+                <a:gridCol w="2194560"/>
+                <a:gridCol w="1645920"/>
               </a:tblGrid>
-              <a:tr h="411480">
+              <a:tr h="457200">
                 <a:tc>
                   <a:txBody>
                     <a:bodyPr/>
@@ -11401,7 +11236,7 @@
                         <a:buNone/>
                       </a:pPr>
                       <a:r>
-                        <a:rPr lang="en-US" sz="1200" b="1" dirty="0">
+                        <a:rPr lang="en-US" sz="1300" b="1" dirty="0">
                           <a:solidFill>
                             <a:srgbClr val="FFFFFF"/>
                           </a:solidFill>
@@ -11411,7 +11246,7 @@
                         </a:rPr>
                         <a:t>수량</a:t>
                       </a:r>
-                      <a:endParaRPr lang="en-US" sz="1200" dirty="0">
+                      <a:endParaRPr lang="en-US" sz="1300" dirty="0">
                         <a:latin typeface="Malgun Gothic" charset="0"/>
                         <a:ea typeface="Malgun Gothic" charset="0"/>
                         <a:cs typeface="Malgun Gothic" charset="0"/>
@@ -11469,7 +11304,7 @@
                         <a:buNone/>
                       </a:pPr>
                       <a:r>
-                        <a:rPr lang="en-US" sz="1200" b="1" dirty="0">
+                        <a:rPr lang="en-US" sz="1300" b="1" dirty="0">
                           <a:solidFill>
                             <a:srgbClr val="FFFFFF"/>
                           </a:solidFill>
@@ -11479,7 +11314,7 @@
                         </a:rPr>
                         <a:t>가격</a:t>
                       </a:r>
-                      <a:endParaRPr lang="en-US" sz="1200" dirty="0">
+                      <a:endParaRPr lang="en-US" sz="1300" dirty="0">
                         <a:latin typeface="Malgun Gothic" charset="0"/>
                         <a:ea typeface="Malgun Gothic" charset="0"/>
                         <a:cs typeface="Malgun Gothic" charset="0"/>
@@ -11537,7 +11372,7 @@
                         <a:buNone/>
                       </a:pPr>
                       <a:r>
-                        <a:rPr lang="en-US" sz="1200" b="1" dirty="0">
+                        <a:rPr lang="en-US" sz="1300" b="1" dirty="0">
                           <a:solidFill>
                             <a:srgbClr val="FFFFFF"/>
                           </a:solidFill>
@@ -11547,7 +11382,7 @@
                         </a:rPr>
                         <a:t>할인</a:t>
                       </a:r>
-                      <a:endParaRPr lang="en-US" sz="1200" dirty="0">
+                      <a:endParaRPr lang="en-US" sz="1300" dirty="0">
                         <a:latin typeface="Malgun Gothic" charset="0"/>
                         <a:ea typeface="Malgun Gothic" charset="0"/>
                         <a:cs typeface="Malgun Gothic" charset="0"/>
@@ -11597,7 +11432,7 @@
                   </a:tcPr>
                 </a:tc>
               </a:tr>
-              <a:tr h="411480">
+              <a:tr h="457200">
                 <a:tc>
                   <a:txBody>
                     <a:bodyPr/>
@@ -11607,7 +11442,7 @@
                         <a:buNone/>
                       </a:pPr>
                       <a:r>
-                        <a:rPr lang="en-US" sz="1200" dirty="0">
+                        <a:rPr lang="en-US" sz="1300" dirty="0">
                           <a:solidFill>
                             <a:srgbClr val="2C2418"/>
                           </a:solidFill>
@@ -11617,7 +11452,7 @@
                         </a:rPr>
                         <a:t>1코인</a:t>
                       </a:r>
-                      <a:endParaRPr lang="en-US" sz="1200" dirty="0">
+                      <a:endParaRPr lang="en-US" sz="1300" dirty="0">
                         <a:latin typeface="Malgun Gothic" charset="0"/>
                         <a:ea typeface="Malgun Gothic" charset="0"/>
                         <a:cs typeface="Malgun Gothic" charset="0"/>
@@ -11672,7 +11507,7 @@
                         <a:buNone/>
                       </a:pPr>
                       <a:r>
-                        <a:rPr lang="en-US" sz="1200" dirty="0">
+                        <a:rPr lang="en-US" sz="1300" dirty="0">
                           <a:solidFill>
                             <a:srgbClr val="2C2418"/>
                           </a:solidFill>
@@ -11682,7 +11517,7 @@
                         </a:rPr>
                         <a:t>990원</a:t>
                       </a:r>
-                      <a:endParaRPr lang="en-US" sz="1200" dirty="0">
+                      <a:endParaRPr lang="en-US" sz="1300" dirty="0">
                         <a:latin typeface="Malgun Gothic" charset="0"/>
                         <a:ea typeface="Malgun Gothic" charset="0"/>
                         <a:cs typeface="Malgun Gothic" charset="0"/>
@@ -11737,7 +11572,7 @@
                         <a:buNone/>
                       </a:pPr>
                       <a:r>
-                        <a:rPr lang="en-US" sz="1200" dirty="0">
+                        <a:rPr lang="en-US" sz="1300" dirty="0">
                           <a:solidFill>
                             <a:srgbClr val="2C2418"/>
                           </a:solidFill>
@@ -11747,7 +11582,7 @@
                         </a:rPr>
                         <a:t>-</a:t>
                       </a:r>
-                      <a:endParaRPr lang="en-US" sz="1200" dirty="0">
+                      <a:endParaRPr lang="en-US" sz="1300" dirty="0">
                         <a:latin typeface="Malgun Gothic" charset="0"/>
                         <a:ea typeface="Malgun Gothic" charset="0"/>
                         <a:cs typeface="Malgun Gothic" charset="0"/>
@@ -11794,7 +11629,7 @@
                   </a:tcPr>
                 </a:tc>
               </a:tr>
-              <a:tr h="411480">
+              <a:tr h="457200">
                 <a:tc>
                   <a:txBody>
                     <a:bodyPr/>
@@ -11804,7 +11639,7 @@
                         <a:buNone/>
                       </a:pPr>
                       <a:r>
-                        <a:rPr lang="en-US" sz="1200" dirty="0">
+                        <a:rPr lang="en-US" sz="1300" dirty="0">
                           <a:solidFill>
                             <a:srgbClr val="2C2418"/>
                           </a:solidFill>
@@ -11814,7 +11649,7 @@
                         </a:rPr>
                         <a:t>3코인</a:t>
                       </a:r>
-                      <a:endParaRPr lang="en-US" sz="1200" dirty="0">
+                      <a:endParaRPr lang="en-US" sz="1300" dirty="0">
                         <a:latin typeface="Malgun Gothic" charset="0"/>
                         <a:ea typeface="Malgun Gothic" charset="0"/>
                         <a:cs typeface="Malgun Gothic" charset="0"/>
@@ -11869,7 +11704,7 @@
                         <a:buNone/>
                       </a:pPr>
                       <a:r>
-                        <a:rPr lang="en-US" sz="1200" dirty="0">
+                        <a:rPr lang="en-US" sz="1300" dirty="0">
                           <a:solidFill>
                             <a:srgbClr val="2C2418"/>
                           </a:solidFill>
@@ -11879,7 +11714,7 @@
                         </a:rPr>
                         <a:t>2,700원</a:t>
                       </a:r>
-                      <a:endParaRPr lang="en-US" sz="1200" dirty="0">
+                      <a:endParaRPr lang="en-US" sz="1300" dirty="0">
                         <a:latin typeface="Malgun Gothic" charset="0"/>
                         <a:ea typeface="Malgun Gothic" charset="0"/>
                         <a:cs typeface="Malgun Gothic" charset="0"/>
@@ -11934,7 +11769,7 @@
                         <a:buNone/>
                       </a:pPr>
                       <a:r>
-                        <a:rPr lang="en-US" sz="1200" dirty="0">
+                        <a:rPr lang="en-US" sz="1300" dirty="0">
                           <a:solidFill>
                             <a:srgbClr val="2C2418"/>
                           </a:solidFill>
@@ -11944,7 +11779,7 @@
                         </a:rPr>
                         <a:t>-9%</a:t>
                       </a:r>
-                      <a:endParaRPr lang="en-US" sz="1200" dirty="0">
+                      <a:endParaRPr lang="en-US" sz="1300" dirty="0">
                         <a:latin typeface="Malgun Gothic" charset="0"/>
                         <a:ea typeface="Malgun Gothic" charset="0"/>
                         <a:cs typeface="Malgun Gothic" charset="0"/>
@@ -11991,7 +11826,7 @@
                   </a:tcPr>
                 </a:tc>
               </a:tr>
-              <a:tr h="411480">
+              <a:tr h="457200">
                 <a:tc>
                   <a:txBody>
                     <a:bodyPr/>
@@ -12001,7 +11836,7 @@
                         <a:buNone/>
                       </a:pPr>
                       <a:r>
-                        <a:rPr lang="en-US" sz="1200" dirty="0">
+                        <a:rPr lang="en-US" sz="1300" dirty="0">
                           <a:solidFill>
                             <a:srgbClr val="2C2418"/>
                           </a:solidFill>
@@ -12011,7 +11846,7 @@
                         </a:rPr>
                         <a:t>5코인</a:t>
                       </a:r>
-                      <a:endParaRPr lang="en-US" sz="1200" dirty="0">
+                      <a:endParaRPr lang="en-US" sz="1300" dirty="0">
                         <a:latin typeface="Malgun Gothic" charset="0"/>
                         <a:ea typeface="Malgun Gothic" charset="0"/>
                         <a:cs typeface="Malgun Gothic" charset="0"/>
@@ -12066,7 +11901,7 @@
                         <a:buNone/>
                       </a:pPr>
                       <a:r>
-                        <a:rPr lang="en-US" sz="1200" dirty="0">
+                        <a:rPr lang="en-US" sz="1300" dirty="0">
                           <a:solidFill>
                             <a:srgbClr val="2C2418"/>
                           </a:solidFill>
@@ -12076,7 +11911,7 @@
                         </a:rPr>
                         <a:t>4,200원</a:t>
                       </a:r>
-                      <a:endParaRPr lang="en-US" sz="1200" dirty="0">
+                      <a:endParaRPr lang="en-US" sz="1300" dirty="0">
                         <a:latin typeface="Malgun Gothic" charset="0"/>
                         <a:ea typeface="Malgun Gothic" charset="0"/>
                         <a:cs typeface="Malgun Gothic" charset="0"/>
@@ -12131,7 +11966,7 @@
                         <a:buNone/>
                       </a:pPr>
                       <a:r>
-                        <a:rPr lang="en-US" sz="1200" dirty="0">
+                        <a:rPr lang="en-US" sz="1300" dirty="0">
                           <a:solidFill>
                             <a:srgbClr val="2C2418"/>
                           </a:solidFill>
@@ -12141,7 +11976,7 @@
                         </a:rPr>
                         <a:t>-15%</a:t>
                       </a:r>
-                      <a:endParaRPr lang="en-US" sz="1200" dirty="0">
+                      <a:endParaRPr lang="en-US" sz="1300" dirty="0">
                         <a:latin typeface="Malgun Gothic" charset="0"/>
                         <a:ea typeface="Malgun Gothic" charset="0"/>
                         <a:cs typeface="Malgun Gothic" charset="0"/>
@@ -12188,7 +12023,7 @@
                   </a:tcPr>
                 </a:tc>
               </a:tr>
-              <a:tr h="411480">
+              <a:tr h="457200">
                 <a:tc>
                   <a:txBody>
                     <a:bodyPr/>
@@ -12198,7 +12033,7 @@
                         <a:buNone/>
                       </a:pPr>
                       <a:r>
-                        <a:rPr lang="en-US" sz="1200" dirty="0">
+                        <a:rPr lang="en-US" sz="1300" dirty="0">
                           <a:solidFill>
                             <a:srgbClr val="2C2418"/>
                           </a:solidFill>
@@ -12208,7 +12043,7 @@
                         </a:rPr>
                         <a:t>10코인</a:t>
                       </a:r>
-                      <a:endParaRPr lang="en-US" sz="1200" dirty="0">
+                      <a:endParaRPr lang="en-US" sz="1300" dirty="0">
                         <a:latin typeface="Malgun Gothic" charset="0"/>
                         <a:ea typeface="Malgun Gothic" charset="0"/>
                         <a:cs typeface="Malgun Gothic" charset="0"/>
@@ -12263,7 +12098,7 @@
                         <a:buNone/>
                       </a:pPr>
                       <a:r>
-                        <a:rPr lang="en-US" sz="1200" dirty="0">
+                        <a:rPr lang="en-US" sz="1300" dirty="0">
                           <a:solidFill>
                             <a:srgbClr val="2C2418"/>
                           </a:solidFill>
@@ -12273,7 +12108,7 @@
                         </a:rPr>
                         <a:t>7,900원</a:t>
                       </a:r>
-                      <a:endParaRPr lang="en-US" sz="1200" dirty="0">
+                      <a:endParaRPr lang="en-US" sz="1300" dirty="0">
                         <a:latin typeface="Malgun Gothic" charset="0"/>
                         <a:ea typeface="Malgun Gothic" charset="0"/>
                         <a:cs typeface="Malgun Gothic" charset="0"/>
@@ -12328,7 +12163,7 @@
                         <a:buNone/>
                       </a:pPr>
                       <a:r>
-                        <a:rPr lang="en-US" sz="1200" dirty="0">
+                        <a:rPr lang="en-US" sz="1300" dirty="0">
                           <a:solidFill>
                             <a:srgbClr val="2C2418"/>
                           </a:solidFill>
@@ -12338,7 +12173,7 @@
                         </a:rPr>
                         <a:t>-20%</a:t>
                       </a:r>
-                      <a:endParaRPr lang="en-US" sz="1200" dirty="0">
+                      <a:endParaRPr lang="en-US" sz="1300" dirty="0">
                         <a:latin typeface="Malgun Gothic" charset="0"/>
                         <a:ea typeface="Malgun Gothic" charset="0"/>
                         <a:cs typeface="Malgun Gothic" charset="0"/>
@@ -12391,14 +12226,14 @@
       </p:graphicFrame>
       <p:sp>
         <p:nvSpPr>
-          <p:cNvPr id="12" name="Text 9"/>
-          <p:cNvSpPr/>
-          <p:nvPr/>
-        </p:nvSpPr>
-        <p:spPr>
-          <a:xfrm>
-            <a:off x="7040880" y="5120640"/>
-            <a:ext cx="4663440" cy="1005840"/>
+          <p:cNvPr id="11" name="Text 7"/>
+          <p:cNvSpPr/>
+          <p:nvPr/>
+        </p:nvSpPr>
+        <p:spPr>
+          <a:xfrm>
+            <a:off x="3200400" y="5486400"/>
+            <a:ext cx="8503920" cy="731520"/>
           </a:xfrm>
           <a:prstGeom prst="rect">
             <a:avLst/>
@@ -12414,7 +12249,7 @@
               <a:buNone/>
             </a:pPr>
             <a:r>
-              <a:rPr lang="en-US" sz="1100" i="1" dirty="0">
+              <a:rPr lang="en-US" sz="1200" i="1" dirty="0">
                 <a:solidFill>
                   <a:srgbClr val="8A8070"/>
                 </a:solidFill>
@@ -12424,14 +12259,14 @@
               </a:rPr>
               <a:t>※ 비로그인 상태로 /pricing 에서 상품·가격 확인 가능.</a:t>
             </a:r>
-            <a:endParaRPr lang="en-US" sz="1100" dirty="0"/>
+            <a:endParaRPr lang="en-US" sz="1200" dirty="0"/>
           </a:p>
           <a:p>
             <a:pPr indent="0" marL="0">
               <a:buNone/>
             </a:pPr>
             <a:r>
-              <a:rPr lang="en-US" sz="1100" i="1" dirty="0">
+              <a:rPr lang="en-US" sz="1200" i="1" dirty="0">
                 <a:solidFill>
                   <a:srgbClr val="8A8070"/>
                 </a:solidFill>
@@ -12441,13 +12276,13 @@
               </a:rPr>
               <a:t>   결제 버튼은 로그인 유도로 연결됩니다.</a:t>
             </a:r>
-            <a:endParaRPr lang="en-US" sz="1100" dirty="0"/>
-          </a:p>
-        </p:txBody>
-      </p:sp>
-      <p:sp>
-        <p:nvSpPr>
-          <p:cNvPr id="13" name="Text 10"/>
+            <a:endParaRPr lang="en-US" sz="1200" dirty="0"/>
+          </a:p>
+        </p:txBody>
+      </p:sp>
+      <p:sp>
+        <p:nvSpPr>
+          <p:cNvPr id="12" name="Text 8"/>
           <p:cNvSpPr/>
           <p:nvPr/>
         </p:nvSpPr>
@@ -12486,7 +12321,7 @@
       </p:sp>
       <p:sp>
         <p:nvSpPr>
-          <p:cNvPr id="14" name="Text 11"/>
+          <p:cNvPr id="13" name="Text 9"/>
           <p:cNvSpPr/>
           <p:nvPr/>
         </p:nvSpPr>
@@ -12642,134 +12477,79 @@
         <p:spPr>
           <a:xfrm>
             <a:off x="548640" y="1737360"/>
-            <a:ext cx="6858000" cy="4480560"/>
+            <a:ext cx="2286000" cy="4754880"/>
           </a:xfrm>
           <a:prstGeom prst="rect">
             <a:avLst/>
           </a:prstGeom>
           <a:solidFill>
-            <a:srgbClr val="E8E0D0"/>
+            <a:srgbClr val="FFFFFF"/>
           </a:solidFill>
           <a:ln w="12700">
             <a:solidFill>
               <a:srgbClr val="D4B070"/>
             </a:solidFill>
-            <a:prstDash val="dash"/>
+            <a:prstDash val="solid"/>
           </a:ln>
         </p:spPr>
       </p:sp>
-      <p:sp>
-        <p:nvSpPr>
-          <p:cNvPr id="5" name="Text 3"/>
-          <p:cNvSpPr/>
-          <p:nvPr/>
-        </p:nvSpPr>
-        <p:spPr>
-          <a:xfrm>
-            <a:off x="548640" y="3520440"/>
-            <a:ext cx="6858000" cy="365760"/>
-          </a:xfrm>
-          <a:prstGeom prst="rect">
-            <a:avLst/>
-          </a:prstGeom>
-          <a:noFill/>
-          <a:ln/>
-        </p:spPr>
-        <p:txBody>
-          <a:bodyPr wrap="square" rtlCol="0" anchor="ctr"/>
-          <a:lstStyle/>
-          <a:p>
-            <a:pPr algn="ctr" indent="0" marL="0">
-              <a:buNone/>
-            </a:pPr>
-            <a:r>
-              <a:rPr lang="en-US" sz="1600" b="1" dirty="0">
-                <a:solidFill>
-                  <a:srgbClr val="A89878"/>
-                </a:solidFill>
-                <a:latin typeface="Malgun Gothic" pitchFamily="34" charset="0"/>
-                <a:ea typeface="Malgun Gothic" pitchFamily="34" charset="-122"/>
-                <a:cs typeface="Malgun Gothic" pitchFamily="34" charset="-120"/>
-              </a:rPr>
-              <a:t>여기에 스크린샷 삽입</a:t>
-            </a:r>
-            <a:endParaRPr lang="en-US" sz="1600" dirty="0"/>
-          </a:p>
-        </p:txBody>
-      </p:sp>
-      <p:sp>
-        <p:nvSpPr>
-          <p:cNvPr id="6" name="Text 4"/>
-          <p:cNvSpPr/>
-          <p:nvPr/>
-        </p:nvSpPr>
-        <p:spPr>
-          <a:xfrm>
-            <a:off x="548640" y="3931920"/>
-            <a:ext cx="6858000" cy="274320"/>
-          </a:xfrm>
-          <a:prstGeom prst="rect">
-            <a:avLst/>
-          </a:prstGeom>
-          <a:noFill/>
-          <a:ln/>
-        </p:spPr>
-        <p:txBody>
-          <a:bodyPr wrap="square" rtlCol="0" anchor="ctr"/>
-          <a:lstStyle/>
-          <a:p>
-            <a:pPr algn="ctr" indent="0" marL="0">
-              <a:buNone/>
-            </a:pPr>
-            <a:r>
-              <a:rPr lang="en-US" sz="1100" i="1" dirty="0">
-                <a:solidFill>
-                  <a:srgbClr val="A89878"/>
-                </a:solidFill>
-                <a:latin typeface="Malgun Gothic" pitchFamily="34" charset="0"/>
-                <a:ea typeface="Malgun Gothic" pitchFamily="34" charset="-122"/>
-                <a:cs typeface="Malgun Gothic" pitchFamily="34" charset="-120"/>
-              </a:rPr>
-              <a:t>https://gatch-saju.onato.co.kr/login</a:t>
-            </a:r>
-            <a:endParaRPr lang="en-US" sz="1100" dirty="0"/>
-          </a:p>
-        </p:txBody>
-      </p:sp>
-      <p:sp>
-        <p:nvSpPr>
-          <p:cNvPr id="7" name="Text 5"/>
-          <p:cNvSpPr/>
-          <p:nvPr/>
-        </p:nvSpPr>
-        <p:spPr>
-          <a:xfrm>
-            <a:off x="548640" y="4251960"/>
-            <a:ext cx="6858000" cy="274320"/>
-          </a:xfrm>
-          <a:prstGeom prst="rect">
-            <a:avLst/>
-          </a:prstGeom>
-          <a:noFill/>
-          <a:ln/>
-        </p:spPr>
-        <p:txBody>
-          <a:bodyPr wrap="square" rtlCol="0" anchor="ctr"/>
-          <a:lstStyle/>
-          <a:p>
-            <a:pPr algn="ctr" indent="0" marL="0">
-              <a:buNone/>
-            </a:pPr>
-            <a:r>
-              <a:rPr lang="en-US" sz="1000" dirty="0">
-                <a:solidFill>
-                  <a:srgbClr val="A89878"/>
-                </a:solidFill>
-                <a:latin typeface="Malgun Gothic" pitchFamily="34" charset="0"/>
-                <a:ea typeface="Malgun Gothic" pitchFamily="34" charset="-122"/>
-                <a:cs typeface="Malgun Gothic" pitchFamily="34" charset="-120"/>
-              </a:rPr>
-              <a:t>(1200 × 900 권장 · 프로덕션에서 실제 화면 캡처)</a:t>
+      <p:pic>
+        <p:nvPicPr>
+          <p:cNvPr id="5" name="Image 0" descr="/Users/kyun/Desktop/project/fortune_imgessage/docs/screenshots/07-login.png">    </p:cNvPr>
+          <p:cNvPicPr>
+            <a:picLocks noChangeAspect="1"/>
+          </p:cNvPicPr>
+          <p:nvPr/>
+        </p:nvPicPr>
+        <p:blipFill>
+          <a:blip r:embed="rId1"/>
+          <a:srcRect l="0" r="0" t="0" b="0"/>
+          <a:stretch/>
+        </p:blipFill>
+        <p:spPr>
+          <a:xfrm>
+            <a:off x="548640" y="1737360"/>
+            <a:ext cx="2286000" cy="4754880"/>
+          </a:xfrm>
+          <a:prstGeom prst="rect">
+            <a:avLst/>
+          </a:prstGeom>
+        </p:spPr>
+      </p:pic>
+      <p:sp>
+        <p:nvSpPr>
+          <p:cNvPr id="6" name="Text 3"/>
+          <p:cNvSpPr/>
+          <p:nvPr/>
+        </p:nvSpPr>
+        <p:spPr>
+          <a:xfrm>
+            <a:off x="3200400" y="1737360"/>
+            <a:ext cx="8503920" cy="274320"/>
+          </a:xfrm>
+          <a:prstGeom prst="rect">
+            <a:avLst/>
+          </a:prstGeom>
+          <a:noFill/>
+          <a:ln/>
+        </p:spPr>
+        <p:txBody>
+          <a:bodyPr wrap="square" rtlCol="0" anchor="ctr"/>
+          <a:lstStyle/>
+          <a:p>
+            <a:pPr indent="0" marL="0">
+              <a:buNone/>
+            </a:pPr>
+            <a:r>
+              <a:rPr lang="en-US" sz="1000" b="1" spc="300" kern="0" dirty="0">
+                <a:solidFill>
+                  <a:srgbClr val="9A7040"/>
+                </a:solidFill>
+                <a:latin typeface="Malgun Gothic" pitchFamily="34" charset="0"/>
+                <a:ea typeface="Malgun Gothic" pitchFamily="34" charset="-122"/>
+                <a:cs typeface="Malgun Gothic" pitchFamily="34" charset="-120"/>
+              </a:rPr>
+              <a:t>URL</a:t>
             </a:r>
             <a:endParaRPr lang="en-US" sz="1000" dirty="0"/>
           </a:p>
@@ -12777,14 +12557,16 @@
       </p:sp>
       <p:sp>
         <p:nvSpPr>
-          <p:cNvPr id="8" name="Text 6"/>
-          <p:cNvSpPr/>
-          <p:nvPr/>
-        </p:nvSpPr>
-        <p:spPr>
-          <a:xfrm>
-            <a:off x="7680960" y="1737360"/>
-            <a:ext cx="4023360" cy="274320"/>
+          <p:cNvPr id="7" name="Text 4">
+            <a:hlinkClick r:id="rId2" tooltip=""/>
+          </p:cNvPr>
+          <p:cNvSpPr/>
+          <p:nvPr/>
+        </p:nvSpPr>
+        <p:spPr>
+          <a:xfrm>
+            <a:off x="3200400" y="2011680"/>
+            <a:ext cx="8503920" cy="365760"/>
           </a:xfrm>
           <a:prstGeom prst="rect">
             <a:avLst/>
@@ -12800,55 +12582,14 @@
               <a:buNone/>
             </a:pPr>
             <a:r>
-              <a:rPr lang="en-US" sz="1000" b="1" spc="300" kern="0" dirty="0">
-                <a:solidFill>
-                  <a:srgbClr val="9A7040"/>
-                </a:solidFill>
-                <a:latin typeface="Malgun Gothic" pitchFamily="34" charset="0"/>
-                <a:ea typeface="Malgun Gothic" pitchFamily="34" charset="-122"/>
-                <a:cs typeface="Malgun Gothic" pitchFamily="34" charset="-120"/>
-              </a:rPr>
-              <a:t>URL</a:t>
-            </a:r>
-            <a:endParaRPr lang="en-US" sz="1000" dirty="0"/>
-          </a:p>
-        </p:txBody>
-      </p:sp>
-      <p:sp>
-        <p:nvSpPr>
-          <p:cNvPr id="9" name="Text 7">
-            <a:hlinkClick r:id="rId1" tooltip=""/>
-          </p:cNvPr>
-          <p:cNvSpPr/>
-          <p:nvPr/>
-        </p:nvSpPr>
-        <p:spPr>
-          <a:xfrm>
-            <a:off x="7680960" y="2011680"/>
-            <a:ext cx="4023360" cy="365760"/>
-          </a:xfrm>
-          <a:prstGeom prst="rect">
-            <a:avLst/>
-          </a:prstGeom>
-          <a:noFill/>
-          <a:ln/>
-        </p:spPr>
-        <p:txBody>
-          <a:bodyPr wrap="square" rtlCol="0" anchor="ctr"/>
-          <a:lstStyle/>
-          <a:p>
-            <a:pPr indent="0" marL="0">
-              <a:buNone/>
-            </a:pPr>
-            <a:r>
-              <a:rPr lang="en-US" sz="1200" u="sng" dirty="0">
+              <a:rPr lang="en-US" sz="1300" u="sng" dirty="0">
                 <a:solidFill>
                   <a:srgbClr val="2C2418"/>
                 </a:solidFill>
                 <a:latin typeface="Malgun Gothic" pitchFamily="34" charset="0"/>
                 <a:ea typeface="Malgun Gothic" pitchFamily="34" charset="-122"/>
                 <a:cs typeface="Malgun Gothic" pitchFamily="34" charset="-120"/>
-                <a:hlinkClick r:id="rId1" invalidUrl="" action="" tgtFrame="" tooltip="" history="1" highlightClick="0" endSnd="0">
+                <a:hlinkClick r:id="rId2" invalidUrl="" action="" tgtFrame="" tooltip="" history="1" highlightClick="0" endSnd="0">
                   <a:extLst>
                     <a:ext uri="{A12FA001-AC4F-418D-AE19-62706E023703}">
                       <ahyp:hlinkClr xmlns:ahyp="http://schemas.microsoft.com/office/drawing/2018/hyperlinkcolor" val="tx"/>
@@ -12858,20 +12599,20 @@
               </a:rPr>
               <a:t>https://gatch-saju.onato.co.kr/login</a:t>
             </a:r>
-            <a:endParaRPr lang="en-US" sz="1200" dirty="0"/>
-          </a:p>
-        </p:txBody>
-      </p:sp>
-      <p:sp>
-        <p:nvSpPr>
-          <p:cNvPr id="10" name="Shape 8"/>
-          <p:cNvSpPr/>
-          <p:nvPr/>
-        </p:nvSpPr>
-        <p:spPr>
-          <a:xfrm>
-            <a:off x="7680960" y="2560320"/>
-            <a:ext cx="4023360" cy="0"/>
+            <a:endParaRPr lang="en-US" sz="1300" dirty="0"/>
+          </a:p>
+        </p:txBody>
+      </p:sp>
+      <p:sp>
+        <p:nvSpPr>
+          <p:cNvPr id="8" name="Shape 5"/>
+          <p:cNvSpPr/>
+          <p:nvPr/>
+        </p:nvSpPr>
+        <p:spPr>
+          <a:xfrm>
+            <a:off x="3200400" y="2560320"/>
+            <a:ext cx="8503920" cy="0"/>
           </a:xfrm>
           <a:prstGeom prst="line">
             <a:avLst/>
@@ -12887,14 +12628,14 @@
       </p:sp>
       <p:sp>
         <p:nvSpPr>
-          <p:cNvPr id="11" name="Text 9"/>
-          <p:cNvSpPr/>
-          <p:nvPr/>
-        </p:nvSpPr>
-        <p:spPr>
-          <a:xfrm>
-            <a:off x="7680960" y="2743200"/>
-            <a:ext cx="4023360" cy="274320"/>
+          <p:cNvPr id="9" name="Text 6"/>
+          <p:cNvSpPr/>
+          <p:nvPr/>
+        </p:nvSpPr>
+        <p:spPr>
+          <a:xfrm>
+            <a:off x="3200400" y="2743200"/>
+            <a:ext cx="8503920" cy="274320"/>
           </a:xfrm>
           <a:prstGeom prst="rect">
             <a:avLst/>
@@ -12926,14 +12667,14 @@
       </p:sp>
       <p:sp>
         <p:nvSpPr>
-          <p:cNvPr id="12" name="Text 10"/>
-          <p:cNvSpPr/>
-          <p:nvPr/>
-        </p:nvSpPr>
-        <p:spPr>
-          <a:xfrm>
-            <a:off x="7680960" y="3017520"/>
-            <a:ext cx="4023360" cy="3200400"/>
+          <p:cNvPr id="10" name="Text 7"/>
+          <p:cNvSpPr/>
+          <p:nvPr/>
+        </p:nvSpPr>
+        <p:spPr>
+          <a:xfrm>
+            <a:off x="3200400" y="3017520"/>
+            <a:ext cx="8503920" cy="3200400"/>
           </a:xfrm>
           <a:prstGeom prst="rect">
             <a:avLst/>
@@ -12947,13 +12688,13 @@
           <a:p>
             <a:pPr marL="342900" indent="-342900">
               <a:spcAft>
-                <a:spcPts val="600"/>
+                <a:spcPts val="800"/>
               </a:spcAft>
               <a:buSzPct val="100000"/>
               <a:buChar char="●"/>
             </a:pPr>
             <a:r>
-              <a:rPr lang="en-US" sz="1200" dirty="0">
+              <a:rPr lang="en-US" sz="1300" dirty="0">
                 <a:solidFill>
                   <a:srgbClr val="2C2418"/>
                 </a:solidFill>
@@ -12963,18 +12704,18 @@
               </a:rPr>
               <a:t>카카오 계정으로 소셜 로그인</a:t>
             </a:r>
-            <a:endParaRPr lang="en-US" sz="1200" dirty="0"/>
+            <a:endParaRPr lang="en-US" sz="1300" dirty="0"/>
           </a:p>
           <a:p>
             <a:pPr marL="342900" indent="-342900">
               <a:spcAft>
-                <a:spcPts val="600"/>
+                <a:spcPts val="800"/>
               </a:spcAft>
               <a:buSzPct val="100000"/>
               <a:buChar char="●"/>
             </a:pPr>
             <a:r>
-              <a:rPr lang="en-US" sz="1200" dirty="0">
+              <a:rPr lang="en-US" sz="1300" dirty="0">
                 <a:solidFill>
                   <a:srgbClr val="2C2418"/>
                 </a:solidFill>
@@ -12984,18 +12725,18 @@
               </a:rPr>
               <a:t>네이버·구글은 현재 "준비 중" 상태 (비활성)</a:t>
             </a:r>
-            <a:endParaRPr lang="en-US" sz="1200" dirty="0"/>
+            <a:endParaRPr lang="en-US" sz="1300" dirty="0"/>
           </a:p>
           <a:p>
             <a:pPr marL="342900" indent="-342900">
               <a:spcAft>
-                <a:spcPts val="600"/>
+                <a:spcPts val="800"/>
               </a:spcAft>
               <a:buSzPct val="100000"/>
               <a:buChar char="●"/>
             </a:pPr>
             <a:r>
-              <a:rPr lang="en-US" sz="1200" dirty="0">
+              <a:rPr lang="en-US" sz="1300" dirty="0">
                 <a:solidFill>
                   <a:srgbClr val="2C2418"/>
                 </a:solidFill>
@@ -13005,13 +12746,13 @@
               </a:rPr>
               <a:t>NextAuth.js 기반, Redirect URI는 카카오 콘솔에 등록됨</a:t>
             </a:r>
-            <a:endParaRPr lang="en-US" sz="1200" dirty="0"/>
-          </a:p>
-        </p:txBody>
-      </p:sp>
-      <p:sp>
-        <p:nvSpPr>
-          <p:cNvPr id="13" name="Text 11"/>
+            <a:endParaRPr lang="en-US" sz="1300" dirty="0"/>
+          </a:p>
+        </p:txBody>
+      </p:sp>
+      <p:sp>
+        <p:nvSpPr>
+          <p:cNvPr id="11" name="Text 8"/>
           <p:cNvSpPr/>
           <p:nvPr/>
         </p:nvSpPr>
@@ -13050,7 +12791,7 @@
       </p:sp>
       <p:sp>
         <p:nvSpPr>
-          <p:cNvPr id="14" name="Text 12"/>
+          <p:cNvPr id="12" name="Text 9"/>
           <p:cNvSpPr/>
           <p:nvPr/>
         </p:nvSpPr>
@@ -13206,7 +12947,7 @@
         <p:spPr>
           <a:xfrm>
             <a:off x="548640" y="1737360"/>
-            <a:ext cx="6858000" cy="4480560"/>
+            <a:ext cx="2286000" cy="4754880"/>
           </a:xfrm>
           <a:prstGeom prst="rect">
             <a:avLst/>
@@ -13230,8 +12971,8 @@
         </p:nvSpPr>
         <p:spPr>
           <a:xfrm>
-            <a:off x="548640" y="3520440"/>
-            <a:ext cx="6858000" cy="365760"/>
+            <a:off x="548640" y="3657600"/>
+            <a:ext cx="2286000" cy="365760"/>
           </a:xfrm>
           <a:prstGeom prst="rect">
             <a:avLst/>
@@ -13269,8 +13010,8 @@
         </p:nvSpPr>
         <p:spPr>
           <a:xfrm>
-            <a:off x="548640" y="3931920"/>
-            <a:ext cx="6858000" cy="274320"/>
+            <a:off x="548640" y="4069080"/>
+            <a:ext cx="2286000" cy="274320"/>
           </a:xfrm>
           <a:prstGeom prst="rect">
             <a:avLst/>
@@ -13308,8 +13049,8 @@
         </p:nvSpPr>
         <p:spPr>
           <a:xfrm>
-            <a:off x="548640" y="4251960"/>
-            <a:ext cx="6858000" cy="274320"/>
+            <a:off x="548640" y="4389120"/>
+            <a:ext cx="2286000" cy="274320"/>
           </a:xfrm>
           <a:prstGeom prst="rect">
             <a:avLst/>
@@ -13347,8 +13088,8 @@
         </p:nvSpPr>
         <p:spPr>
           <a:xfrm>
-            <a:off x="7680960" y="1737360"/>
-            <a:ext cx="4023360" cy="274320"/>
+            <a:off x="3200400" y="1737360"/>
+            <a:ext cx="8503920" cy="274320"/>
           </a:xfrm>
           <a:prstGeom prst="rect">
             <a:avLst/>
@@ -13388,8 +13129,8 @@
         </p:nvSpPr>
         <p:spPr>
           <a:xfrm>
-            <a:off x="7680960" y="2011680"/>
-            <a:ext cx="4023360" cy="365760"/>
+            <a:off x="3200400" y="2011680"/>
+            <a:ext cx="8503920" cy="365760"/>
           </a:xfrm>
           <a:prstGeom prst="rect">
             <a:avLst/>
@@ -13405,7 +13146,7 @@
               <a:buNone/>
             </a:pPr>
             <a:r>
-              <a:rPr lang="en-US" sz="1200" u="sng" dirty="0">
+              <a:rPr lang="en-US" sz="1300" u="sng" dirty="0">
                 <a:solidFill>
                   <a:srgbClr val="2C2418"/>
                 </a:solidFill>
@@ -13422,7 +13163,7 @@
               </a:rPr>
               <a:t>https://gatch-saju.onato.co.kr/</a:t>
             </a:r>
-            <a:endParaRPr lang="en-US" sz="1200" dirty="0"/>
+            <a:endParaRPr lang="en-US" sz="1300" dirty="0"/>
           </a:p>
         </p:txBody>
       </p:sp>
@@ -13434,8 +13175,8 @@
         </p:nvSpPr>
         <p:spPr>
           <a:xfrm>
-            <a:off x="7680960" y="2560320"/>
-            <a:ext cx="4023360" cy="0"/>
+            <a:off x="3200400" y="2560320"/>
+            <a:ext cx="8503920" cy="0"/>
           </a:xfrm>
           <a:prstGeom prst="line">
             <a:avLst/>
@@ -13457,8 +13198,8 @@
         </p:nvSpPr>
         <p:spPr>
           <a:xfrm>
-            <a:off x="7680960" y="2743200"/>
-            <a:ext cx="4023360" cy="274320"/>
+            <a:off x="3200400" y="2743200"/>
+            <a:ext cx="8503920" cy="274320"/>
           </a:xfrm>
           <a:prstGeom prst="rect">
             <a:avLst/>
@@ -13496,8 +13237,8 @@
         </p:nvSpPr>
         <p:spPr>
           <a:xfrm>
-            <a:off x="7680960" y="3017520"/>
-            <a:ext cx="4023360" cy="3200400"/>
+            <a:off x="3200400" y="3017520"/>
+            <a:ext cx="8503920" cy="3200400"/>
           </a:xfrm>
           <a:prstGeom prst="rect">
             <a:avLst/>
@@ -13511,13 +13252,13 @@
           <a:p>
             <a:pPr marL="342900" indent="-342900">
               <a:spcAft>
-                <a:spcPts val="600"/>
+                <a:spcPts val="800"/>
               </a:spcAft>
               <a:buSzPct val="100000"/>
               <a:buChar char="●"/>
             </a:pPr>
             <a:r>
-              <a:rPr lang="en-US" sz="1200" dirty="0">
+              <a:rPr lang="en-US" sz="1300" dirty="0">
                 <a:solidFill>
                   <a:srgbClr val="2C2418"/>
                 </a:solidFill>
@@ -13527,18 +13268,18 @@
               </a:rPr>
               <a:t>상단 헤더에 현재 코인 잔액 배지 (✮ N) 항시 노출</a:t>
             </a:r>
-            <a:endParaRPr lang="en-US" sz="1200" dirty="0"/>
+            <a:endParaRPr lang="en-US" sz="1300" dirty="0"/>
           </a:p>
           <a:p>
             <a:pPr marL="342900" indent="-342900">
               <a:spcAft>
-                <a:spcPts val="600"/>
+                <a:spcPts val="800"/>
               </a:spcAft>
               <a:buSzPct val="100000"/>
               <a:buChar char="●"/>
             </a:pPr>
             <a:r>
-              <a:rPr lang="en-US" sz="1200" dirty="0">
+              <a:rPr lang="en-US" sz="1300" dirty="0">
                 <a:solidFill>
                   <a:srgbClr val="2C2418"/>
                 </a:solidFill>
@@ -13548,18 +13289,18 @@
               </a:rPr>
               <a:t>캐릭터 슬롯 리스트 — 본인/가족/지인 구분</a:t>
             </a:r>
-            <a:endParaRPr lang="en-US" sz="1200" dirty="0"/>
+            <a:endParaRPr lang="en-US" sz="1300" dirty="0"/>
           </a:p>
           <a:p>
             <a:pPr marL="342900" indent="-342900">
               <a:spcAft>
-                <a:spcPts val="600"/>
+                <a:spcPts val="800"/>
               </a:spcAft>
               <a:buSzPct val="100000"/>
               <a:buChar char="●"/>
             </a:pPr>
             <a:r>
-              <a:rPr lang="en-US" sz="1200" dirty="0">
+              <a:rPr lang="en-US" sz="1300" dirty="0">
                 <a:solidFill>
                   <a:srgbClr val="2C2418"/>
                 </a:solidFill>
@@ -13569,7 +13310,7 @@
               </a:rPr>
               <a:t>배지 클릭 시 /coins 지갑 페이지로 이동</a:t>
             </a:r>
-            <a:endParaRPr lang="en-US" sz="1200" dirty="0"/>
+            <a:endParaRPr lang="en-US" sz="1300" dirty="0"/>
           </a:p>
         </p:txBody>
       </p:sp>
@@ -13770,7 +13511,7 @@
         <p:spPr>
           <a:xfrm>
             <a:off x="548640" y="1737360"/>
-            <a:ext cx="6858000" cy="4480560"/>
+            <a:ext cx="2286000" cy="4754880"/>
           </a:xfrm>
           <a:prstGeom prst="rect">
             <a:avLst/>
@@ -13794,8 +13535,8 @@
         </p:nvSpPr>
         <p:spPr>
           <a:xfrm>
-            <a:off x="548640" y="3520440"/>
-            <a:ext cx="6858000" cy="365760"/>
+            <a:off x="548640" y="3657600"/>
+            <a:ext cx="2286000" cy="365760"/>
           </a:xfrm>
           <a:prstGeom prst="rect">
             <a:avLst/>
@@ -13833,8 +13574,8 @@
         </p:nvSpPr>
         <p:spPr>
           <a:xfrm>
-            <a:off x="548640" y="3931920"/>
-            <a:ext cx="6858000" cy="274320"/>
+            <a:off x="548640" y="4069080"/>
+            <a:ext cx="2286000" cy="274320"/>
           </a:xfrm>
           <a:prstGeom prst="rect">
             <a:avLst/>
@@ -13872,8 +13613,8 @@
         </p:nvSpPr>
         <p:spPr>
           <a:xfrm>
-            <a:off x="548640" y="4251960"/>
-            <a:ext cx="6858000" cy="274320"/>
+            <a:off x="548640" y="4389120"/>
+            <a:ext cx="2286000" cy="274320"/>
           </a:xfrm>
           <a:prstGeom prst="rect">
             <a:avLst/>
@@ -13911,8 +13652,8 @@
         </p:nvSpPr>
         <p:spPr>
           <a:xfrm>
-            <a:off x="7680960" y="1737360"/>
-            <a:ext cx="4023360" cy="274320"/>
+            <a:off x="3200400" y="1737360"/>
+            <a:ext cx="8503920" cy="274320"/>
           </a:xfrm>
           <a:prstGeom prst="rect">
             <a:avLst/>
@@ -13952,8 +13693,8 @@
         </p:nvSpPr>
         <p:spPr>
           <a:xfrm>
-            <a:off x="7680960" y="2011680"/>
-            <a:ext cx="4023360" cy="365760"/>
+            <a:off x="3200400" y="2011680"/>
+            <a:ext cx="8503920" cy="365760"/>
           </a:xfrm>
           <a:prstGeom prst="rect">
             <a:avLst/>
@@ -13969,7 +13710,7 @@
               <a:buNone/>
             </a:pPr>
             <a:r>
-              <a:rPr lang="en-US" sz="1200" u="sng" dirty="0">
+              <a:rPr lang="en-US" sz="1300" u="sng" dirty="0">
                 <a:solidFill>
                   <a:srgbClr val="2C2418"/>
                 </a:solidFill>
@@ -13986,7 +13727,7 @@
               </a:rPr>
               <a:t>https://gatch-saju.onato.co.kr/coins</a:t>
             </a:r>
-            <a:endParaRPr lang="en-US" sz="1200" dirty="0"/>
+            <a:endParaRPr lang="en-US" sz="1300" dirty="0"/>
           </a:p>
         </p:txBody>
       </p:sp>
@@ -13998,8 +13739,8 @@
         </p:nvSpPr>
         <p:spPr>
           <a:xfrm>
-            <a:off x="7680960" y="2560320"/>
-            <a:ext cx="4023360" cy="0"/>
+            <a:off x="3200400" y="2560320"/>
+            <a:ext cx="8503920" cy="0"/>
           </a:xfrm>
           <a:prstGeom prst="line">
             <a:avLst/>
@@ -14021,8 +13762,8 @@
         </p:nvSpPr>
         <p:spPr>
           <a:xfrm>
-            <a:off x="7680960" y="2743200"/>
-            <a:ext cx="4023360" cy="274320"/>
+            <a:off x="3200400" y="2743200"/>
+            <a:ext cx="8503920" cy="274320"/>
           </a:xfrm>
           <a:prstGeom prst="rect">
             <a:avLst/>
@@ -14060,8 +13801,8 @@
         </p:nvSpPr>
         <p:spPr>
           <a:xfrm>
-            <a:off x="7680960" y="3017520"/>
-            <a:ext cx="4023360" cy="3200400"/>
+            <a:off x="3200400" y="3017520"/>
+            <a:ext cx="8503920" cy="3200400"/>
           </a:xfrm>
           <a:prstGeom prst="rect">
             <a:avLst/>
@@ -14075,13 +13816,13 @@
           <a:p>
             <a:pPr marL="342900" indent="-342900">
               <a:spcAft>
-                <a:spcPts val="600"/>
+                <a:spcPts val="800"/>
               </a:spcAft>
               <a:buSzPct val="100000"/>
               <a:buChar char="●"/>
             </a:pPr>
             <a:r>
-              <a:rPr lang="en-US" sz="1200" dirty="0">
+              <a:rPr lang="en-US" sz="1300" dirty="0">
                 <a:solidFill>
                   <a:srgbClr val="2C2418"/>
                 </a:solidFill>
@@ -14091,18 +13832,18 @@
               </a:rPr>
               <a:t>4개 코인 패키지 카드 (1·3·5·10)</a:t>
             </a:r>
-            <a:endParaRPr lang="en-US" sz="1200" dirty="0"/>
+            <a:endParaRPr lang="en-US" sz="1300" dirty="0"/>
           </a:p>
           <a:p>
             <a:pPr marL="342900" indent="-342900">
               <a:spcAft>
-                <a:spcPts val="600"/>
+                <a:spcPts val="800"/>
               </a:spcAft>
               <a:buSzPct val="100000"/>
               <a:buChar char="●"/>
             </a:pPr>
             <a:r>
-              <a:rPr lang="en-US" sz="1200" dirty="0">
+              <a:rPr lang="en-US" sz="1300" dirty="0">
                 <a:solidFill>
                   <a:srgbClr val="2C2418"/>
                 </a:solidFill>
@@ -14112,18 +13853,18 @@
               </a:rPr>
               <a:t>카드 클릭 즉시 토스페이먼츠 결제창 호출</a:t>
             </a:r>
-            <a:endParaRPr lang="en-US" sz="1200" dirty="0"/>
+            <a:endParaRPr lang="en-US" sz="1300" dirty="0"/>
           </a:p>
           <a:p>
             <a:pPr marL="342900" indent="-342900">
               <a:spcAft>
-                <a:spcPts val="600"/>
+                <a:spcPts val="800"/>
               </a:spcAft>
               <a:buSzPct val="100000"/>
               <a:buChar char="●"/>
             </a:pPr>
             <a:r>
-              <a:rPr lang="en-US" sz="1200" dirty="0">
+              <a:rPr lang="en-US" sz="1300" dirty="0">
                 <a:solidFill>
                   <a:srgbClr val="2C2418"/>
                 </a:solidFill>
@@ -14133,7 +13874,7 @@
               </a:rPr>
               <a:t>상단에 현재 잔액 표시, 하단에 환불 정책 요약</a:t>
             </a:r>
-            <a:endParaRPr lang="en-US" sz="1200" dirty="0"/>
+            <a:endParaRPr lang="en-US" sz="1300" dirty="0"/>
           </a:p>
         </p:txBody>
       </p:sp>

--- a/docs/toss-payment-flow.pptx
+++ b/docs/toss-payment-flow.pptx
@@ -3957,136 +3957,42 @@
             <a:avLst/>
           </a:prstGeom>
           <a:solidFill>
-            <a:srgbClr val="E8E0D0"/>
+            <a:srgbClr val="FFFFFF"/>
           </a:solidFill>
           <a:ln w="12700">
             <a:solidFill>
               <a:srgbClr val="D4B070"/>
             </a:solidFill>
-            <a:prstDash val="dash"/>
+            <a:prstDash val="solid"/>
           </a:ln>
         </p:spPr>
       </p:sp>
-      <p:sp>
-        <p:nvSpPr>
-          <p:cNvPr id="5" name="Text 3"/>
-          <p:cNvSpPr/>
-          <p:nvPr/>
-        </p:nvSpPr>
-        <p:spPr>
-          <a:xfrm>
-            <a:off x="548640" y="3657600"/>
-            <a:ext cx="2286000" cy="365760"/>
-          </a:xfrm>
-          <a:prstGeom prst="rect">
-            <a:avLst/>
-          </a:prstGeom>
-          <a:noFill/>
-          <a:ln/>
-        </p:spPr>
-        <p:txBody>
-          <a:bodyPr wrap="square" rtlCol="0" anchor="ctr"/>
-          <a:lstStyle/>
-          <a:p>
-            <a:pPr algn="ctr" indent="0" marL="0">
-              <a:buNone/>
-            </a:pPr>
-            <a:r>
-              <a:rPr lang="en-US" sz="1600" b="1" dirty="0">
-                <a:solidFill>
-                  <a:srgbClr val="A89878"/>
-                </a:solidFill>
-                <a:latin typeface="Malgun Gothic" pitchFamily="34" charset="0"/>
-                <a:ea typeface="Malgun Gothic" pitchFamily="34" charset="-122"/>
-                <a:cs typeface="Malgun Gothic" pitchFamily="34" charset="-120"/>
-              </a:rPr>
-              <a:t>여기에 스크린샷 삽입</a:t>
-            </a:r>
-            <a:endParaRPr lang="en-US" sz="1600" dirty="0"/>
-          </a:p>
-        </p:txBody>
-      </p:sp>
-      <p:sp>
-        <p:nvSpPr>
-          <p:cNvPr id="6" name="Text 4"/>
-          <p:cNvSpPr/>
-          <p:nvPr/>
-        </p:nvSpPr>
-        <p:spPr>
-          <a:xfrm>
-            <a:off x="548640" y="4069080"/>
-            <a:ext cx="2286000" cy="274320"/>
-          </a:xfrm>
-          <a:prstGeom prst="rect">
-            <a:avLst/>
-          </a:prstGeom>
-          <a:noFill/>
-          <a:ln/>
-        </p:spPr>
-        <p:txBody>
-          <a:bodyPr wrap="square" rtlCol="0" anchor="ctr"/>
-          <a:lstStyle/>
-          <a:p>
-            <a:pPr algn="ctr" indent="0" marL="0">
-              <a:buNone/>
-            </a:pPr>
-            <a:r>
-              <a:rPr lang="en-US" sz="1100" i="1" dirty="0">
-                <a:solidFill>
-                  <a:srgbClr val="A89878"/>
-                </a:solidFill>
-                <a:latin typeface="Malgun Gothic" pitchFamily="34" charset="0"/>
-                <a:ea typeface="Malgun Gothic" pitchFamily="34" charset="-122"/>
-                <a:cs typeface="Malgun Gothic" pitchFamily="34" charset="-120"/>
-              </a:rPr>
-              <a:t>https://gatch-saju.onato.co.kr/coins/fail</a:t>
-            </a:r>
-            <a:endParaRPr lang="en-US" sz="1100" dirty="0"/>
-          </a:p>
-        </p:txBody>
-      </p:sp>
-      <p:sp>
-        <p:nvSpPr>
-          <p:cNvPr id="7" name="Text 5"/>
-          <p:cNvSpPr/>
-          <p:nvPr/>
-        </p:nvSpPr>
-        <p:spPr>
-          <a:xfrm>
-            <a:off x="548640" y="4389120"/>
-            <a:ext cx="2286000" cy="274320"/>
-          </a:xfrm>
-          <a:prstGeom prst="rect">
-            <a:avLst/>
-          </a:prstGeom>
-          <a:noFill/>
-          <a:ln/>
-        </p:spPr>
-        <p:txBody>
-          <a:bodyPr wrap="square" rtlCol="0" anchor="ctr"/>
-          <a:lstStyle/>
-          <a:p>
-            <a:pPr algn="ctr" indent="0" marL="0">
-              <a:buNone/>
-            </a:pPr>
-            <a:r>
-              <a:rPr lang="en-US" sz="1000" dirty="0">
-                <a:solidFill>
-                  <a:srgbClr val="A89878"/>
-                </a:solidFill>
-                <a:latin typeface="Malgun Gothic" pitchFamily="34" charset="0"/>
-                <a:ea typeface="Malgun Gothic" pitchFamily="34" charset="-122"/>
-                <a:cs typeface="Malgun Gothic" pitchFamily="34" charset="-120"/>
-              </a:rPr>
-              <a:t>(1200 × 900 권장 · 프로덕션에서 실제 화면 캡처)</a:t>
-            </a:r>
-            <a:endParaRPr lang="en-US" sz="1000" dirty="0"/>
-          </a:p>
-        </p:txBody>
-      </p:sp>
-      <p:sp>
-        <p:nvSpPr>
-          <p:cNvPr id="8" name="Text 6"/>
+      <p:pic>
+        <p:nvPicPr>
+          <p:cNvPr id="5" name="Image 0" descr="/Users/kyun/Desktop/project/fortune_imgessage/docs/screenshots/13-coins-fail.png">    </p:cNvPr>
+          <p:cNvPicPr>
+            <a:picLocks noChangeAspect="1"/>
+          </p:cNvPicPr>
+          <p:nvPr/>
+        </p:nvPicPr>
+        <p:blipFill>
+          <a:blip r:embed="rId1"/>
+          <a:srcRect l="0" r="0" t="0" b="0"/>
+          <a:stretch/>
+        </p:blipFill>
+        <p:spPr>
+          <a:xfrm>
+            <a:off x="548640" y="1737360"/>
+            <a:ext cx="2286000" cy="4754880"/>
+          </a:xfrm>
+          <a:prstGeom prst="rect">
+            <a:avLst/>
+          </a:prstGeom>
+        </p:spPr>
+      </p:pic>
+      <p:sp>
+        <p:nvSpPr>
+          <p:cNvPr id="6" name="Text 3"/>
           <p:cNvSpPr/>
           <p:nvPr/>
         </p:nvSpPr>
@@ -4125,8 +4031,8 @@
       </p:sp>
       <p:sp>
         <p:nvSpPr>
-          <p:cNvPr id="9" name="Text 7">
-            <a:hlinkClick r:id="rId1" tooltip=""/>
+          <p:cNvPr id="7" name="Text 4">
+            <a:hlinkClick r:id="rId2" tooltip=""/>
           </p:cNvPr>
           <p:cNvSpPr/>
           <p:nvPr/>
@@ -4157,7 +4063,7 @@
                 <a:latin typeface="Malgun Gothic" pitchFamily="34" charset="0"/>
                 <a:ea typeface="Malgun Gothic" pitchFamily="34" charset="-122"/>
                 <a:cs typeface="Malgun Gothic" pitchFamily="34" charset="-120"/>
-                <a:hlinkClick r:id="rId1" invalidUrl="" action="" tgtFrame="" tooltip="" history="1" highlightClick="0" endSnd="0">
+                <a:hlinkClick r:id="rId2" invalidUrl="" action="" tgtFrame="" tooltip="" history="1" highlightClick="0" endSnd="0">
                   <a:extLst>
                     <a:ext uri="{A12FA001-AC4F-418D-AE19-62706E023703}">
                       <ahyp:hlinkClr xmlns:ahyp="http://schemas.microsoft.com/office/drawing/2018/hyperlinkcolor" val="tx"/>
@@ -4173,7 +4079,7 @@
       </p:sp>
       <p:sp>
         <p:nvSpPr>
-          <p:cNvPr id="10" name="Shape 8"/>
+          <p:cNvPr id="8" name="Shape 5"/>
           <p:cNvSpPr/>
           <p:nvPr/>
         </p:nvSpPr>
@@ -4196,7 +4102,7 @@
       </p:sp>
       <p:sp>
         <p:nvSpPr>
-          <p:cNvPr id="11" name="Text 9"/>
+          <p:cNvPr id="9" name="Text 6"/>
           <p:cNvSpPr/>
           <p:nvPr/>
         </p:nvSpPr>
@@ -4235,7 +4141,7 @@
       </p:sp>
       <p:sp>
         <p:nvSpPr>
-          <p:cNvPr id="12" name="Text 10"/>
+          <p:cNvPr id="10" name="Text 7"/>
           <p:cNvSpPr/>
           <p:nvPr/>
         </p:nvSpPr>
@@ -4320,7 +4226,7 @@
       </p:sp>
       <p:sp>
         <p:nvSpPr>
-          <p:cNvPr id="13" name="Text 11"/>
+          <p:cNvPr id="11" name="Text 8"/>
           <p:cNvSpPr/>
           <p:nvPr/>
         </p:nvSpPr>
@@ -4359,7 +4265,7 @@
       </p:sp>
       <p:sp>
         <p:nvSpPr>
-          <p:cNvPr id="14" name="Text 12"/>
+          <p:cNvPr id="12" name="Text 9"/>
           <p:cNvSpPr/>
           <p:nvPr/>
         </p:nvSpPr>
@@ -4521,136 +4427,42 @@
             <a:avLst/>
           </a:prstGeom>
           <a:solidFill>
-            <a:srgbClr val="E8E0D0"/>
+            <a:srgbClr val="FFFFFF"/>
           </a:solidFill>
           <a:ln w="12700">
             <a:solidFill>
               <a:srgbClr val="D4B070"/>
             </a:solidFill>
-            <a:prstDash val="dash"/>
+            <a:prstDash val="solid"/>
           </a:ln>
         </p:spPr>
       </p:sp>
-      <p:sp>
-        <p:nvSpPr>
-          <p:cNvPr id="5" name="Text 3"/>
-          <p:cNvSpPr/>
-          <p:nvPr/>
-        </p:nvSpPr>
-        <p:spPr>
-          <a:xfrm>
-            <a:off x="548640" y="3657600"/>
-            <a:ext cx="2286000" cy="365760"/>
-          </a:xfrm>
-          <a:prstGeom prst="rect">
-            <a:avLst/>
-          </a:prstGeom>
-          <a:noFill/>
-          <a:ln/>
-        </p:spPr>
-        <p:txBody>
-          <a:bodyPr wrap="square" rtlCol="0" anchor="ctr"/>
-          <a:lstStyle/>
-          <a:p>
-            <a:pPr algn="ctr" indent="0" marL="0">
-              <a:buNone/>
-            </a:pPr>
-            <a:r>
-              <a:rPr lang="en-US" sz="1600" b="1" dirty="0">
-                <a:solidFill>
-                  <a:srgbClr val="A89878"/>
-                </a:solidFill>
-                <a:latin typeface="Malgun Gothic" pitchFamily="34" charset="0"/>
-                <a:ea typeface="Malgun Gothic" pitchFamily="34" charset="-122"/>
-                <a:cs typeface="Malgun Gothic" pitchFamily="34" charset="-120"/>
-              </a:rPr>
-              <a:t>여기에 스크린샷 삽입</a:t>
-            </a:r>
-            <a:endParaRPr lang="en-US" sz="1600" dirty="0"/>
-          </a:p>
-        </p:txBody>
-      </p:sp>
-      <p:sp>
-        <p:nvSpPr>
-          <p:cNvPr id="6" name="Text 4"/>
-          <p:cNvSpPr/>
-          <p:nvPr/>
-        </p:nvSpPr>
-        <p:spPr>
-          <a:xfrm>
-            <a:off x="548640" y="4069080"/>
-            <a:ext cx="2286000" cy="274320"/>
-          </a:xfrm>
-          <a:prstGeom prst="rect">
-            <a:avLst/>
-          </a:prstGeom>
-          <a:noFill/>
-          <a:ln/>
-        </p:spPr>
-        <p:txBody>
-          <a:bodyPr wrap="square" rtlCol="0" anchor="ctr"/>
-          <a:lstStyle/>
-          <a:p>
-            <a:pPr algn="ctr" indent="0" marL="0">
-              <a:buNone/>
-            </a:pPr>
-            <a:r>
-              <a:rPr lang="en-US" sz="1100" i="1" dirty="0">
-                <a:solidFill>
-                  <a:srgbClr val="A89878"/>
-                </a:solidFill>
-                <a:latin typeface="Malgun Gothic" pitchFamily="34" charset="0"/>
-                <a:ea typeface="Malgun Gothic" pitchFamily="34" charset="-122"/>
-                <a:cs typeface="Malgun Gothic" pitchFamily="34" charset="-120"/>
-              </a:rPr>
-              <a:t>https://gatch-saju.onato.co.kr/reading/{id}</a:t>
-            </a:r>
-            <a:endParaRPr lang="en-US" sz="1100" dirty="0"/>
-          </a:p>
-        </p:txBody>
-      </p:sp>
-      <p:sp>
-        <p:nvSpPr>
-          <p:cNvPr id="7" name="Text 5"/>
-          <p:cNvSpPr/>
-          <p:nvPr/>
-        </p:nvSpPr>
-        <p:spPr>
-          <a:xfrm>
-            <a:off x="548640" y="4389120"/>
-            <a:ext cx="2286000" cy="274320"/>
-          </a:xfrm>
-          <a:prstGeom prst="rect">
-            <a:avLst/>
-          </a:prstGeom>
-          <a:noFill/>
-          <a:ln/>
-        </p:spPr>
-        <p:txBody>
-          <a:bodyPr wrap="square" rtlCol="0" anchor="ctr"/>
-          <a:lstStyle/>
-          <a:p>
-            <a:pPr algn="ctr" indent="0" marL="0">
-              <a:buNone/>
-            </a:pPr>
-            <a:r>
-              <a:rPr lang="en-US" sz="1000" dirty="0">
-                <a:solidFill>
-                  <a:srgbClr val="A89878"/>
-                </a:solidFill>
-                <a:latin typeface="Malgun Gothic" pitchFamily="34" charset="0"/>
-                <a:ea typeface="Malgun Gothic" pitchFamily="34" charset="-122"/>
-                <a:cs typeface="Malgun Gothic" pitchFamily="34" charset="-120"/>
-              </a:rPr>
-              <a:t>(1200 × 900 권장 · 프로덕션에서 실제 화면 캡처)</a:t>
-            </a:r>
-            <a:endParaRPr lang="en-US" sz="1000" dirty="0"/>
-          </a:p>
-        </p:txBody>
-      </p:sp>
-      <p:sp>
-        <p:nvSpPr>
-          <p:cNvPr id="8" name="Text 6"/>
+      <p:pic>
+        <p:nvPicPr>
+          <p:cNvPr id="5" name="Image 0" descr="/Users/kyun/Desktop/project/fortune_imgessage/docs/screenshots/19-reading-detail.png">    </p:cNvPr>
+          <p:cNvPicPr>
+            <a:picLocks noChangeAspect="1"/>
+          </p:cNvPicPr>
+          <p:nvPr/>
+        </p:nvPicPr>
+        <p:blipFill>
+          <a:blip r:embed="rId1"/>
+          <a:srcRect l="0" r="0" t="0" b="0"/>
+          <a:stretch/>
+        </p:blipFill>
+        <p:spPr>
+          <a:xfrm>
+            <a:off x="548640" y="1737360"/>
+            <a:ext cx="2286000" cy="4754880"/>
+          </a:xfrm>
+          <a:prstGeom prst="rect">
+            <a:avLst/>
+          </a:prstGeom>
+        </p:spPr>
+      </p:pic>
+      <p:sp>
+        <p:nvSpPr>
+          <p:cNvPr id="6" name="Text 3"/>
           <p:cNvSpPr/>
           <p:nvPr/>
         </p:nvSpPr>
@@ -4689,8 +4501,8 @@
       </p:sp>
       <p:sp>
         <p:nvSpPr>
-          <p:cNvPr id="9" name="Text 7">
-            <a:hlinkClick r:id="rId1" tooltip=""/>
+          <p:cNvPr id="7" name="Text 4">
+            <a:hlinkClick r:id="rId2" tooltip=""/>
           </p:cNvPr>
           <p:cNvSpPr/>
           <p:nvPr/>
@@ -4721,7 +4533,7 @@
                 <a:latin typeface="Malgun Gothic" pitchFamily="34" charset="0"/>
                 <a:ea typeface="Malgun Gothic" pitchFamily="34" charset="-122"/>
                 <a:cs typeface="Malgun Gothic" pitchFamily="34" charset="-120"/>
-                <a:hlinkClick r:id="rId1" invalidUrl="" action="" tgtFrame="" tooltip="" history="1" highlightClick="0" endSnd="0">
+                <a:hlinkClick r:id="rId2" invalidUrl="" action="" tgtFrame="" tooltip="" history="1" highlightClick="0" endSnd="0">
                   <a:extLst>
                     <a:ext uri="{A12FA001-AC4F-418D-AE19-62706E023703}">
                       <ahyp:hlinkClr xmlns:ahyp="http://schemas.microsoft.com/office/drawing/2018/hyperlinkcolor" val="tx"/>
@@ -4737,7 +4549,7 @@
       </p:sp>
       <p:sp>
         <p:nvSpPr>
-          <p:cNvPr id="10" name="Shape 8"/>
+          <p:cNvPr id="8" name="Shape 5"/>
           <p:cNvSpPr/>
           <p:nvPr/>
         </p:nvSpPr>
@@ -4760,7 +4572,7 @@
       </p:sp>
       <p:sp>
         <p:nvSpPr>
-          <p:cNvPr id="11" name="Text 9"/>
+          <p:cNvPr id="9" name="Text 6"/>
           <p:cNvSpPr/>
           <p:nvPr/>
         </p:nvSpPr>
@@ -4799,7 +4611,7 @@
       </p:sp>
       <p:sp>
         <p:nvSpPr>
-          <p:cNvPr id="12" name="Text 10"/>
+          <p:cNvPr id="10" name="Text 7"/>
           <p:cNvSpPr/>
           <p:nvPr/>
         </p:nvSpPr>
@@ -4905,7 +4717,7 @@
       </p:sp>
       <p:sp>
         <p:nvSpPr>
-          <p:cNvPr id="13" name="Text 11"/>
+          <p:cNvPr id="11" name="Text 8"/>
           <p:cNvSpPr/>
           <p:nvPr/>
         </p:nvSpPr>
@@ -4944,7 +4756,7 @@
       </p:sp>
       <p:sp>
         <p:nvSpPr>
-          <p:cNvPr id="14" name="Text 12"/>
+          <p:cNvPr id="12" name="Text 9"/>
           <p:cNvSpPr/>
           <p:nvPr/>
         </p:nvSpPr>
@@ -5958,136 +5770,42 @@
             <a:avLst/>
           </a:prstGeom>
           <a:solidFill>
-            <a:srgbClr val="E8E0D0"/>
+            <a:srgbClr val="FFFFFF"/>
           </a:solidFill>
           <a:ln w="12700">
             <a:solidFill>
               <a:srgbClr val="D4B070"/>
             </a:solidFill>
-            <a:prstDash val="dash"/>
+            <a:prstDash val="solid"/>
           </a:ln>
         </p:spPr>
       </p:sp>
-      <p:sp>
-        <p:nvSpPr>
-          <p:cNvPr id="5" name="Text 3"/>
-          <p:cNvSpPr/>
-          <p:nvPr/>
-        </p:nvSpPr>
-        <p:spPr>
-          <a:xfrm>
-            <a:off x="548640" y="3657600"/>
-            <a:ext cx="2286000" cy="365760"/>
-          </a:xfrm>
-          <a:prstGeom prst="rect">
-            <a:avLst/>
-          </a:prstGeom>
-          <a:noFill/>
-          <a:ln/>
-        </p:spPr>
-        <p:txBody>
-          <a:bodyPr wrap="square" rtlCol="0" anchor="ctr"/>
-          <a:lstStyle/>
-          <a:p>
-            <a:pPr algn="ctr" indent="0" marL="0">
-              <a:buNone/>
-            </a:pPr>
-            <a:r>
-              <a:rPr lang="en-US" sz="1600" b="1" dirty="0">
-                <a:solidFill>
-                  <a:srgbClr val="A89878"/>
-                </a:solidFill>
-                <a:latin typeface="Malgun Gothic" pitchFamily="34" charset="0"/>
-                <a:ea typeface="Malgun Gothic" pitchFamily="34" charset="-122"/>
-                <a:cs typeface="Malgun Gothic" pitchFamily="34" charset="-120"/>
-              </a:rPr>
-              <a:t>여기에 스크린샷 삽입</a:t>
-            </a:r>
-            <a:endParaRPr lang="en-US" sz="1600" dirty="0"/>
-          </a:p>
-        </p:txBody>
-      </p:sp>
-      <p:sp>
-        <p:nvSpPr>
-          <p:cNvPr id="6" name="Text 4"/>
-          <p:cNvSpPr/>
-          <p:nvPr/>
-        </p:nvSpPr>
-        <p:spPr>
-          <a:xfrm>
-            <a:off x="548640" y="4069080"/>
-            <a:ext cx="2286000" cy="274320"/>
-          </a:xfrm>
-          <a:prstGeom prst="rect">
-            <a:avLst/>
-          </a:prstGeom>
-          <a:noFill/>
-          <a:ln/>
-        </p:spPr>
-        <p:txBody>
-          <a:bodyPr wrap="square" rtlCol="0" anchor="ctr"/>
-          <a:lstStyle/>
-          <a:p>
-            <a:pPr algn="ctr" indent="0" marL="0">
-              <a:buNone/>
-            </a:pPr>
-            <a:r>
-              <a:rPr lang="en-US" sz="1100" i="1" dirty="0">
-                <a:solidFill>
-                  <a:srgbClr val="A89878"/>
-                </a:solidFill>
-                <a:latin typeface="Malgun Gothic" pitchFamily="34" charset="0"/>
-                <a:ea typeface="Malgun Gothic" pitchFamily="34" charset="-122"/>
-                <a:cs typeface="Malgun Gothic" pitchFamily="34" charset="-120"/>
-              </a:rPr>
-              <a:t>https://gatch-saju.onato.co.kr/mypage</a:t>
-            </a:r>
-            <a:endParaRPr lang="en-US" sz="1100" dirty="0"/>
-          </a:p>
-        </p:txBody>
-      </p:sp>
-      <p:sp>
-        <p:nvSpPr>
-          <p:cNvPr id="7" name="Text 5"/>
-          <p:cNvSpPr/>
-          <p:nvPr/>
-        </p:nvSpPr>
-        <p:spPr>
-          <a:xfrm>
-            <a:off x="548640" y="4389120"/>
-            <a:ext cx="2286000" cy="274320"/>
-          </a:xfrm>
-          <a:prstGeom prst="rect">
-            <a:avLst/>
-          </a:prstGeom>
-          <a:noFill/>
-          <a:ln/>
-        </p:spPr>
-        <p:txBody>
-          <a:bodyPr wrap="square" rtlCol="0" anchor="ctr"/>
-          <a:lstStyle/>
-          <a:p>
-            <a:pPr algn="ctr" indent="0" marL="0">
-              <a:buNone/>
-            </a:pPr>
-            <a:r>
-              <a:rPr lang="en-US" sz="1000" dirty="0">
-                <a:solidFill>
-                  <a:srgbClr val="A89878"/>
-                </a:solidFill>
-                <a:latin typeface="Malgun Gothic" pitchFamily="34" charset="0"/>
-                <a:ea typeface="Malgun Gothic" pitchFamily="34" charset="-122"/>
-                <a:cs typeface="Malgun Gothic" pitchFamily="34" charset="-120"/>
-              </a:rPr>
-              <a:t>(1200 × 900 권장 · 프로덕션에서 실제 화면 캡처)</a:t>
-            </a:r>
-            <a:endParaRPr lang="en-US" sz="1000" dirty="0"/>
-          </a:p>
-        </p:txBody>
-      </p:sp>
-      <p:sp>
-        <p:nvSpPr>
-          <p:cNvPr id="8" name="Text 6"/>
+      <p:pic>
+        <p:nvPicPr>
+          <p:cNvPr id="5" name="Image 0" descr="/Users/kyun/Desktop/project/fortune_imgessage/docs/screenshots/11-mypage.png">    </p:cNvPr>
+          <p:cNvPicPr>
+            <a:picLocks noChangeAspect="1"/>
+          </p:cNvPicPr>
+          <p:nvPr/>
+        </p:nvPicPr>
+        <p:blipFill>
+          <a:blip r:embed="rId1"/>
+          <a:srcRect l="0" r="0" t="0" b="0"/>
+          <a:stretch/>
+        </p:blipFill>
+        <p:spPr>
+          <a:xfrm>
+            <a:off x="548640" y="1737360"/>
+            <a:ext cx="2286000" cy="4754880"/>
+          </a:xfrm>
+          <a:prstGeom prst="rect">
+            <a:avLst/>
+          </a:prstGeom>
+        </p:spPr>
+      </p:pic>
+      <p:sp>
+        <p:nvSpPr>
+          <p:cNvPr id="6" name="Text 3"/>
           <p:cNvSpPr/>
           <p:nvPr/>
         </p:nvSpPr>
@@ -6126,8 +5844,8 @@
       </p:sp>
       <p:sp>
         <p:nvSpPr>
-          <p:cNvPr id="9" name="Text 7">
-            <a:hlinkClick r:id="rId1" tooltip=""/>
+          <p:cNvPr id="7" name="Text 4">
+            <a:hlinkClick r:id="rId2" tooltip=""/>
           </p:cNvPr>
           <p:cNvSpPr/>
           <p:nvPr/>
@@ -6158,7 +5876,7 @@
                 <a:latin typeface="Malgun Gothic" pitchFamily="34" charset="0"/>
                 <a:ea typeface="Malgun Gothic" pitchFamily="34" charset="-122"/>
                 <a:cs typeface="Malgun Gothic" pitchFamily="34" charset="-120"/>
-                <a:hlinkClick r:id="rId1" invalidUrl="" action="" tgtFrame="" tooltip="" history="1" highlightClick="0" endSnd="0">
+                <a:hlinkClick r:id="rId2" invalidUrl="" action="" tgtFrame="" tooltip="" history="1" highlightClick="0" endSnd="0">
                   <a:extLst>
                     <a:ext uri="{A12FA001-AC4F-418D-AE19-62706E023703}">
                       <ahyp:hlinkClr xmlns:ahyp="http://schemas.microsoft.com/office/drawing/2018/hyperlinkcolor" val="tx"/>
@@ -6174,7 +5892,7 @@
       </p:sp>
       <p:sp>
         <p:nvSpPr>
-          <p:cNvPr id="10" name="Shape 8"/>
+          <p:cNvPr id="8" name="Shape 5"/>
           <p:cNvSpPr/>
           <p:nvPr/>
         </p:nvSpPr>
@@ -6197,7 +5915,7 @@
       </p:sp>
       <p:sp>
         <p:nvSpPr>
-          <p:cNvPr id="11" name="Text 9"/>
+          <p:cNvPr id="9" name="Text 6"/>
           <p:cNvSpPr/>
           <p:nvPr/>
         </p:nvSpPr>
@@ -6236,7 +5954,7 @@
       </p:sp>
       <p:sp>
         <p:nvSpPr>
-          <p:cNvPr id="12" name="Text 10"/>
+          <p:cNvPr id="10" name="Text 7"/>
           <p:cNvSpPr/>
           <p:nvPr/>
         </p:nvSpPr>
@@ -6342,7 +6060,7 @@
       </p:sp>
       <p:sp>
         <p:nvSpPr>
-          <p:cNvPr id="13" name="Text 11"/>
+          <p:cNvPr id="11" name="Text 8"/>
           <p:cNvSpPr/>
           <p:nvPr/>
         </p:nvSpPr>
@@ -6381,7 +6099,7 @@
       </p:sp>
       <p:sp>
         <p:nvSpPr>
-          <p:cNvPr id="14" name="Text 12"/>
+          <p:cNvPr id="12" name="Text 9"/>
           <p:cNvSpPr/>
           <p:nvPr/>
         </p:nvSpPr>
@@ -10568,7 +10286,7 @@
       </p:sp>
       <p:pic>
         <p:nvPicPr>
-          <p:cNvPr id="5" name="Image 0" descr="/Users/kyun/Desktop/project/fortune_imgessage/docs/screenshots/05-landing.png">    </p:cNvPr>
+          <p:cNvPr id="5" name="Image 0" descr="/Users/kyun/Desktop/project/fortune_imgessage/docs/screenshots/01-landing.png">    </p:cNvPr>
           <p:cNvPicPr>
             <a:picLocks noChangeAspect="1"/>
           </p:cNvPicPr>
@@ -11038,7 +10756,7 @@
       </p:sp>
       <p:pic>
         <p:nvPicPr>
-          <p:cNvPr id="5" name="Image 0" descr="/Users/kyun/Desktop/project/fortune_imgessage/docs/screenshots/06-pricing.png">    </p:cNvPr>
+          <p:cNvPr id="5" name="Image 0" descr="/Users/kyun/Desktop/project/fortune_imgessage/docs/screenshots/03-pricing.png">    </p:cNvPr>
           <p:cNvPicPr>
             <a:picLocks noChangeAspect="1"/>
           </p:cNvPicPr>
@@ -12495,7 +12213,7 @@
       </p:sp>
       <p:pic>
         <p:nvPicPr>
-          <p:cNvPr id="5" name="Image 0" descr="/Users/kyun/Desktop/project/fortune_imgessage/docs/screenshots/07-login.png">    </p:cNvPr>
+          <p:cNvPr id="5" name="Image 0" descr="/Users/kyun/Desktop/project/fortune_imgessage/docs/screenshots/02-login.png">    </p:cNvPr>
           <p:cNvPicPr>
             <a:picLocks noChangeAspect="1"/>
           </p:cNvPicPr>
@@ -12953,136 +12671,42 @@
             <a:avLst/>
           </a:prstGeom>
           <a:solidFill>
-            <a:srgbClr val="E8E0D0"/>
+            <a:srgbClr val="FFFFFF"/>
           </a:solidFill>
           <a:ln w="12700">
             <a:solidFill>
               <a:srgbClr val="D4B070"/>
             </a:solidFill>
-            <a:prstDash val="dash"/>
+            <a:prstDash val="solid"/>
           </a:ln>
         </p:spPr>
       </p:sp>
-      <p:sp>
-        <p:nvSpPr>
-          <p:cNvPr id="5" name="Text 3"/>
-          <p:cNvSpPr/>
-          <p:nvPr/>
-        </p:nvSpPr>
-        <p:spPr>
-          <a:xfrm>
-            <a:off x="548640" y="3657600"/>
-            <a:ext cx="2286000" cy="365760"/>
-          </a:xfrm>
-          <a:prstGeom prst="rect">
-            <a:avLst/>
-          </a:prstGeom>
-          <a:noFill/>
-          <a:ln/>
-        </p:spPr>
-        <p:txBody>
-          <a:bodyPr wrap="square" rtlCol="0" anchor="ctr"/>
-          <a:lstStyle/>
-          <a:p>
-            <a:pPr algn="ctr" indent="0" marL="0">
-              <a:buNone/>
-            </a:pPr>
-            <a:r>
-              <a:rPr lang="en-US" sz="1600" b="1" dirty="0">
-                <a:solidFill>
-                  <a:srgbClr val="A89878"/>
-                </a:solidFill>
-                <a:latin typeface="Malgun Gothic" pitchFamily="34" charset="0"/>
-                <a:ea typeface="Malgun Gothic" pitchFamily="34" charset="-122"/>
-                <a:cs typeface="Malgun Gothic" pitchFamily="34" charset="-120"/>
-              </a:rPr>
-              <a:t>여기에 스크린샷 삽입</a:t>
-            </a:r>
-            <a:endParaRPr lang="en-US" sz="1600" dirty="0"/>
-          </a:p>
-        </p:txBody>
-      </p:sp>
-      <p:sp>
-        <p:nvSpPr>
-          <p:cNvPr id="6" name="Text 4"/>
-          <p:cNvSpPr/>
-          <p:nvPr/>
-        </p:nvSpPr>
-        <p:spPr>
-          <a:xfrm>
-            <a:off x="548640" y="4069080"/>
-            <a:ext cx="2286000" cy="274320"/>
-          </a:xfrm>
-          <a:prstGeom prst="rect">
-            <a:avLst/>
-          </a:prstGeom>
-          <a:noFill/>
-          <a:ln/>
-        </p:spPr>
-        <p:txBody>
-          <a:bodyPr wrap="square" rtlCol="0" anchor="ctr"/>
-          <a:lstStyle/>
-          <a:p>
-            <a:pPr algn="ctr" indent="0" marL="0">
-              <a:buNone/>
-            </a:pPr>
-            <a:r>
-              <a:rPr lang="en-US" sz="1100" i="1" dirty="0">
-                <a:solidFill>
-                  <a:srgbClr val="A89878"/>
-                </a:solidFill>
-                <a:latin typeface="Malgun Gothic" pitchFamily="34" charset="0"/>
-                <a:ea typeface="Malgun Gothic" pitchFamily="34" charset="-122"/>
-                <a:cs typeface="Malgun Gothic" pitchFamily="34" charset="-120"/>
-              </a:rPr>
-              <a:t>https://gatch-saju.onato.co.kr/</a:t>
-            </a:r>
-            <a:endParaRPr lang="en-US" sz="1100" dirty="0"/>
-          </a:p>
-        </p:txBody>
-      </p:sp>
-      <p:sp>
-        <p:nvSpPr>
-          <p:cNvPr id="7" name="Text 5"/>
-          <p:cNvSpPr/>
-          <p:nvPr/>
-        </p:nvSpPr>
-        <p:spPr>
-          <a:xfrm>
-            <a:off x="548640" y="4389120"/>
-            <a:ext cx="2286000" cy="274320"/>
-          </a:xfrm>
-          <a:prstGeom prst="rect">
-            <a:avLst/>
-          </a:prstGeom>
-          <a:noFill/>
-          <a:ln/>
-        </p:spPr>
-        <p:txBody>
-          <a:bodyPr wrap="square" rtlCol="0" anchor="ctr"/>
-          <a:lstStyle/>
-          <a:p>
-            <a:pPr algn="ctr" indent="0" marL="0">
-              <a:buNone/>
-            </a:pPr>
-            <a:r>
-              <a:rPr lang="en-US" sz="1000" dirty="0">
-                <a:solidFill>
-                  <a:srgbClr val="A89878"/>
-                </a:solidFill>
-                <a:latin typeface="Malgun Gothic" pitchFamily="34" charset="0"/>
-                <a:ea typeface="Malgun Gothic" pitchFamily="34" charset="-122"/>
-                <a:cs typeface="Malgun Gothic" pitchFamily="34" charset="-120"/>
-              </a:rPr>
-              <a:t>(1200 × 900 권장 · 프로덕션에서 실제 화면 캡처)</a:t>
-            </a:r>
-            <a:endParaRPr lang="en-US" sz="1000" dirty="0"/>
-          </a:p>
-        </p:txBody>
-      </p:sp>
-      <p:sp>
-        <p:nvSpPr>
-          <p:cNvPr id="8" name="Text 6"/>
+      <p:pic>
+        <p:nvPicPr>
+          <p:cNvPr id="5" name="Image 0" descr="/Users/kyun/Desktop/project/fortune_imgessage/docs/screenshots/09-hub.png">    </p:cNvPr>
+          <p:cNvPicPr>
+            <a:picLocks noChangeAspect="1"/>
+          </p:cNvPicPr>
+          <p:nvPr/>
+        </p:nvPicPr>
+        <p:blipFill>
+          <a:blip r:embed="rId1"/>
+          <a:srcRect l="0" r="0" t="0" b="0"/>
+          <a:stretch/>
+        </p:blipFill>
+        <p:spPr>
+          <a:xfrm>
+            <a:off x="548640" y="1737360"/>
+            <a:ext cx="2286000" cy="4754880"/>
+          </a:xfrm>
+          <a:prstGeom prst="rect">
+            <a:avLst/>
+          </a:prstGeom>
+        </p:spPr>
+      </p:pic>
+      <p:sp>
+        <p:nvSpPr>
+          <p:cNvPr id="6" name="Text 3"/>
           <p:cNvSpPr/>
           <p:nvPr/>
         </p:nvSpPr>
@@ -13121,8 +12745,8 @@
       </p:sp>
       <p:sp>
         <p:nvSpPr>
-          <p:cNvPr id="9" name="Text 7">
-            <a:hlinkClick r:id="rId1" tooltip=""/>
+          <p:cNvPr id="7" name="Text 4">
+            <a:hlinkClick r:id="rId2" tooltip=""/>
           </p:cNvPr>
           <p:cNvSpPr/>
           <p:nvPr/>
@@ -13153,7 +12777,7 @@
                 <a:latin typeface="Malgun Gothic" pitchFamily="34" charset="0"/>
                 <a:ea typeface="Malgun Gothic" pitchFamily="34" charset="-122"/>
                 <a:cs typeface="Malgun Gothic" pitchFamily="34" charset="-120"/>
-                <a:hlinkClick r:id="rId1" invalidUrl="" action="" tgtFrame="" tooltip="" history="1" highlightClick="0" endSnd="0">
+                <a:hlinkClick r:id="rId2" invalidUrl="" action="" tgtFrame="" tooltip="" history="1" highlightClick="0" endSnd="0">
                   <a:extLst>
                     <a:ext uri="{A12FA001-AC4F-418D-AE19-62706E023703}">
                       <ahyp:hlinkClr xmlns:ahyp="http://schemas.microsoft.com/office/drawing/2018/hyperlinkcolor" val="tx"/>
@@ -13169,7 +12793,7 @@
       </p:sp>
       <p:sp>
         <p:nvSpPr>
-          <p:cNvPr id="10" name="Shape 8"/>
+          <p:cNvPr id="8" name="Shape 5"/>
           <p:cNvSpPr/>
           <p:nvPr/>
         </p:nvSpPr>
@@ -13192,7 +12816,7 @@
       </p:sp>
       <p:sp>
         <p:nvSpPr>
-          <p:cNvPr id="11" name="Text 9"/>
+          <p:cNvPr id="9" name="Text 6"/>
           <p:cNvSpPr/>
           <p:nvPr/>
         </p:nvSpPr>
@@ -13231,7 +12855,7 @@
       </p:sp>
       <p:sp>
         <p:nvSpPr>
-          <p:cNvPr id="12" name="Text 10"/>
+          <p:cNvPr id="10" name="Text 7"/>
           <p:cNvSpPr/>
           <p:nvPr/>
         </p:nvSpPr>
@@ -13316,7 +12940,7 @@
       </p:sp>
       <p:sp>
         <p:nvSpPr>
-          <p:cNvPr id="13" name="Text 11"/>
+          <p:cNvPr id="11" name="Text 8"/>
           <p:cNvSpPr/>
           <p:nvPr/>
         </p:nvSpPr>
@@ -13355,7 +12979,7 @@
       </p:sp>
       <p:sp>
         <p:nvSpPr>
-          <p:cNvPr id="14" name="Text 12"/>
+          <p:cNvPr id="12" name="Text 9"/>
           <p:cNvSpPr/>
           <p:nvPr/>
         </p:nvSpPr>
@@ -13517,136 +13141,42 @@
             <a:avLst/>
           </a:prstGeom>
           <a:solidFill>
-            <a:srgbClr val="E8E0D0"/>
+            <a:srgbClr val="FFFFFF"/>
           </a:solidFill>
           <a:ln w="12700">
             <a:solidFill>
               <a:srgbClr val="D4B070"/>
             </a:solidFill>
-            <a:prstDash val="dash"/>
+            <a:prstDash val="solid"/>
           </a:ln>
         </p:spPr>
       </p:sp>
-      <p:sp>
-        <p:nvSpPr>
-          <p:cNvPr id="5" name="Text 3"/>
-          <p:cNvSpPr/>
-          <p:nvPr/>
-        </p:nvSpPr>
-        <p:spPr>
-          <a:xfrm>
-            <a:off x="548640" y="3657600"/>
-            <a:ext cx="2286000" cy="365760"/>
-          </a:xfrm>
-          <a:prstGeom prst="rect">
-            <a:avLst/>
-          </a:prstGeom>
-          <a:noFill/>
-          <a:ln/>
-        </p:spPr>
-        <p:txBody>
-          <a:bodyPr wrap="square" rtlCol="0" anchor="ctr"/>
-          <a:lstStyle/>
-          <a:p>
-            <a:pPr algn="ctr" indent="0" marL="0">
-              <a:buNone/>
-            </a:pPr>
-            <a:r>
-              <a:rPr lang="en-US" sz="1600" b="1" dirty="0">
-                <a:solidFill>
-                  <a:srgbClr val="A89878"/>
-                </a:solidFill>
-                <a:latin typeface="Malgun Gothic" pitchFamily="34" charset="0"/>
-                <a:ea typeface="Malgun Gothic" pitchFamily="34" charset="-122"/>
-                <a:cs typeface="Malgun Gothic" pitchFamily="34" charset="-120"/>
-              </a:rPr>
-              <a:t>여기에 스크린샷 삽입</a:t>
-            </a:r>
-            <a:endParaRPr lang="en-US" sz="1600" dirty="0"/>
-          </a:p>
-        </p:txBody>
-      </p:sp>
-      <p:sp>
-        <p:nvSpPr>
-          <p:cNvPr id="6" name="Text 4"/>
-          <p:cNvSpPr/>
-          <p:nvPr/>
-        </p:nvSpPr>
-        <p:spPr>
-          <a:xfrm>
-            <a:off x="548640" y="4069080"/>
-            <a:ext cx="2286000" cy="274320"/>
-          </a:xfrm>
-          <a:prstGeom prst="rect">
-            <a:avLst/>
-          </a:prstGeom>
-          <a:noFill/>
-          <a:ln/>
-        </p:spPr>
-        <p:txBody>
-          <a:bodyPr wrap="square" rtlCol="0" anchor="ctr"/>
-          <a:lstStyle/>
-          <a:p>
-            <a:pPr algn="ctr" indent="0" marL="0">
-              <a:buNone/>
-            </a:pPr>
-            <a:r>
-              <a:rPr lang="en-US" sz="1100" i="1" dirty="0">
-                <a:solidFill>
-                  <a:srgbClr val="A89878"/>
-                </a:solidFill>
-                <a:latin typeface="Malgun Gothic" pitchFamily="34" charset="0"/>
-                <a:ea typeface="Malgun Gothic" pitchFamily="34" charset="-122"/>
-                <a:cs typeface="Malgun Gothic" pitchFamily="34" charset="-120"/>
-              </a:rPr>
-              <a:t>https://gatch-saju.onato.co.kr/coins</a:t>
-            </a:r>
-            <a:endParaRPr lang="en-US" sz="1100" dirty="0"/>
-          </a:p>
-        </p:txBody>
-      </p:sp>
-      <p:sp>
-        <p:nvSpPr>
-          <p:cNvPr id="7" name="Text 5"/>
-          <p:cNvSpPr/>
-          <p:nvPr/>
-        </p:nvSpPr>
-        <p:spPr>
-          <a:xfrm>
-            <a:off x="548640" y="4389120"/>
-            <a:ext cx="2286000" cy="274320"/>
-          </a:xfrm>
-          <a:prstGeom prst="rect">
-            <a:avLst/>
-          </a:prstGeom>
-          <a:noFill/>
-          <a:ln/>
-        </p:spPr>
-        <p:txBody>
-          <a:bodyPr wrap="square" rtlCol="0" anchor="ctr"/>
-          <a:lstStyle/>
-          <a:p>
-            <a:pPr algn="ctr" indent="0" marL="0">
-              <a:buNone/>
-            </a:pPr>
-            <a:r>
-              <a:rPr lang="en-US" sz="1000" dirty="0">
-                <a:solidFill>
-                  <a:srgbClr val="A89878"/>
-                </a:solidFill>
-                <a:latin typeface="Malgun Gothic" pitchFamily="34" charset="0"/>
-                <a:ea typeface="Malgun Gothic" pitchFamily="34" charset="-122"/>
-                <a:cs typeface="Malgun Gothic" pitchFamily="34" charset="-120"/>
-              </a:rPr>
-              <a:t>(1200 × 900 권장 · 프로덕션에서 실제 화면 캡처)</a:t>
-            </a:r>
-            <a:endParaRPr lang="en-US" sz="1000" dirty="0"/>
-          </a:p>
-        </p:txBody>
-      </p:sp>
-      <p:sp>
-        <p:nvSpPr>
-          <p:cNvPr id="8" name="Text 6"/>
+      <p:pic>
+        <p:nvPicPr>
+          <p:cNvPr id="5" name="Image 0" descr="/Users/kyun/Desktop/project/fortune_imgessage/docs/screenshots/12-coins.png">    </p:cNvPr>
+          <p:cNvPicPr>
+            <a:picLocks noChangeAspect="1"/>
+          </p:cNvPicPr>
+          <p:nvPr/>
+        </p:nvPicPr>
+        <p:blipFill>
+          <a:blip r:embed="rId1"/>
+          <a:srcRect l="0" r="0" t="0" b="0"/>
+          <a:stretch/>
+        </p:blipFill>
+        <p:spPr>
+          <a:xfrm>
+            <a:off x="548640" y="1737360"/>
+            <a:ext cx="2286000" cy="4754880"/>
+          </a:xfrm>
+          <a:prstGeom prst="rect">
+            <a:avLst/>
+          </a:prstGeom>
+        </p:spPr>
+      </p:pic>
+      <p:sp>
+        <p:nvSpPr>
+          <p:cNvPr id="6" name="Text 3"/>
           <p:cNvSpPr/>
           <p:nvPr/>
         </p:nvSpPr>
@@ -13685,8 +13215,8 @@
       </p:sp>
       <p:sp>
         <p:nvSpPr>
-          <p:cNvPr id="9" name="Text 7">
-            <a:hlinkClick r:id="rId1" tooltip=""/>
+          <p:cNvPr id="7" name="Text 4">
+            <a:hlinkClick r:id="rId2" tooltip=""/>
           </p:cNvPr>
           <p:cNvSpPr/>
           <p:nvPr/>
@@ -13717,7 +13247,7 @@
                 <a:latin typeface="Malgun Gothic" pitchFamily="34" charset="0"/>
                 <a:ea typeface="Malgun Gothic" pitchFamily="34" charset="-122"/>
                 <a:cs typeface="Malgun Gothic" pitchFamily="34" charset="-120"/>
-                <a:hlinkClick r:id="rId1" invalidUrl="" action="" tgtFrame="" tooltip="" history="1" highlightClick="0" endSnd="0">
+                <a:hlinkClick r:id="rId2" invalidUrl="" action="" tgtFrame="" tooltip="" history="1" highlightClick="0" endSnd="0">
                   <a:extLst>
                     <a:ext uri="{A12FA001-AC4F-418D-AE19-62706E023703}">
                       <ahyp:hlinkClr xmlns:ahyp="http://schemas.microsoft.com/office/drawing/2018/hyperlinkcolor" val="tx"/>
@@ -13733,7 +13263,7 @@
       </p:sp>
       <p:sp>
         <p:nvSpPr>
-          <p:cNvPr id="10" name="Shape 8"/>
+          <p:cNvPr id="8" name="Shape 5"/>
           <p:cNvSpPr/>
           <p:nvPr/>
         </p:nvSpPr>
@@ -13756,7 +13286,7 @@
       </p:sp>
       <p:sp>
         <p:nvSpPr>
-          <p:cNvPr id="11" name="Text 9"/>
+          <p:cNvPr id="9" name="Text 6"/>
           <p:cNvSpPr/>
           <p:nvPr/>
         </p:nvSpPr>
@@ -13795,7 +13325,7 @@
       </p:sp>
       <p:sp>
         <p:nvSpPr>
-          <p:cNvPr id="12" name="Text 10"/>
+          <p:cNvPr id="10" name="Text 7"/>
           <p:cNvSpPr/>
           <p:nvPr/>
         </p:nvSpPr>
@@ -13880,7 +13410,7 @@
       </p:sp>
       <p:sp>
         <p:nvSpPr>
-          <p:cNvPr id="13" name="Text 11"/>
+          <p:cNvPr id="11" name="Text 8"/>
           <p:cNvSpPr/>
           <p:nvPr/>
         </p:nvSpPr>
@@ -13919,7 +13449,7 @@
       </p:sp>
       <p:sp>
         <p:nvSpPr>
-          <p:cNvPr id="14" name="Text 12"/>
+          <p:cNvPr id="12" name="Text 9"/>
           <p:cNvSpPr/>
           <p:nvPr/>
         </p:nvSpPr>
